--- a/02_Prediccion_y_escenarios_de_riesgo/entrega/presentacion/Umbral_presentacion.pptx
+++ b/02_Prediccion_y_escenarios_de_riesgo/entrega/presentacion/Umbral_presentacion.pptx
@@ -1071,7 +1071,7 @@
           <a:lstStyle/>
           <a:p>
             <a:r>
-              <a:t>Dos métodos × NS 5/10/20: frecuencia topN y concordancia describen estabilidad. No expresan confianza calibrada.</a:t>
+              <a:t>Frecuencia descriptiva, no probabilidad de acierto. La frontera orienta revisión y propuesta de piloto.</a:t>
             </a:r>
           </a:p>
           <a:p>
@@ -1151,7 +1151,7 @@
           <a:lstStyle/>
           <a:p>
             <a:r>
-              <a:t>La proximidad del score no demuestra equivalencia. El prototipo no acredita impacto causal ni un diseño RDD.</a:t>
+              <a:t>Configuración nacional: catálogo constante, tasa, Ridge, 50 municipios, estabilidad Todas. Base SV+NV 2024: 255,362.</a:t>
             </a:r>
           </a:p>
           <a:p>
@@ -1231,7 +1231,7 @@
           <a:lstStyle/>
           <a:p>
             <a:r>
-              <a:t>Límites: pocas ocasiones electorales, cohortes filtradas y armonización territorial pendiente.</a:t>
+              <a:t>Caso completo: entrega/CASO_MUNICIPAL.md. Guion y demo de tres pasos: entrega/GUION_PRESENTACION.md.</a:t>
             </a:r>
           </a:p>
           <a:p>
@@ -4394,7 +4394,7 @@
               </a:defRPr>
             </a:pPr>
             <a:r>
-              <a:t>Predicción exploratoria y escenarios de abstención para 2027</a:t>
+              <a:t>Revisión territorial con evidencia, capacidad y supuestos visibles</a:t>
             </a:r>
           </a:p>
         </p:txBody>
@@ -4502,7 +4502,7 @@
               </a:defRPr>
             </a:pPr>
             <a:r>
-              <a:t>Versión técnica · 5 de octubre de 2026</a:t>
+              <a:t>Versión técnica · 6 de octubre de 2026</a:t>
             </a:r>
           </a:p>
         </p:txBody>
@@ -6759,7 +6759,7 @@
         <p:spPr>
           <a:xfrm>
             <a:off x="594360" y="2331720"/>
-            <a:ext cx="5349240" cy="3378467"/>
+            <a:ext cx="5349240" cy="3248125"/>
           </a:xfrm>
           <a:prstGeom prst="rect">
             <a:avLst/>
@@ -6783,7 +6783,7 @@
         <p:spPr>
           <a:xfrm>
             <a:off x="6263640" y="2331720"/>
-            <a:ext cx="5349240" cy="3378467"/>
+            <a:ext cx="5349240" cy="3248125"/>
           </a:xfrm>
           <a:prstGeom prst="rect">
             <a:avLst/>
@@ -6955,7 +6955,7 @@
               </a:defRPr>
             </a:pPr>
             <a:r>
-              <a:t>La prioridad depende del objetivo</a:t>
+              <a:t>Una ficha para revisar cada prioridad</a:t>
             </a:r>
           </a:p>
         </p:txBody>
@@ -6983,7 +6983,7 @@
           <a:lstStyle/>
           <a:p>
             <a:pPr>
-              <a:defRPr sz="2400" b="1">
+              <a:defRPr sz="2600" b="1">
                 <a:solidFill>
                   <a:srgbClr val="10685F"/>
                 </a:solidFill>
@@ -6991,7 +6991,7 @@
               </a:defRPr>
             </a:pPr>
             <a:r>
-              <a:t>Tasa</a:t>
+              <a:t>¿Por qué este municipio?</a:t>
             </a:r>
           </a:p>
         </p:txBody>
@@ -7004,7 +7004,7 @@
         </p:nvSpPr>
         <p:spPr>
           <a:xfrm>
-            <a:off x="594360" y="2538983"/>
+            <a:off x="594360" y="2569971"/>
             <a:ext cx="10881360" cy="914400"/>
           </a:xfrm>
           <a:prstGeom prst="rect">
@@ -7027,7 +7027,7 @@
               </a:defRPr>
             </a:pPr>
             <a:r>
-              <a:t>Revisa municipios con mayor abstención estimada.</a:t>
+              <a:t>Puesto, antecedentes, calidad NS y acuerdo entre referencia y Ridge. Perfil CCPC por grupos como capa descriptiva separada.</a:t>
             </a:r>
           </a:p>
         </p:txBody>
@@ -7040,7 +7040,7 @@
         </p:nvSpPr>
         <p:spPr>
           <a:xfrm>
-            <a:off x="594360" y="3065525"/>
+            <a:off x="594360" y="3421887"/>
             <a:ext cx="10881360" cy="914400"/>
           </a:xfrm>
           <a:prstGeom prst="rect">
@@ -7055,15 +7055,15 @@
           <a:lstStyle/>
           <a:p>
             <a:pPr>
-              <a:defRPr sz="2400" b="1">
-                <a:solidFill>
-                  <a:srgbClr val="10685F"/>
+              <a:defRPr sz="2200" b="0">
+                <a:solidFill>
+                  <a:srgbClr val="15353B"/>
                 </a:solidFill>
                 <a:latin typeface="Segoe UI"/>
               </a:defRPr>
             </a:pPr>
             <a:r>
-              <a:t>Volumen sobre observados 2024</a:t>
+              <a:t>Estabilidad de selección: dos métodos × NS 5/10/20.</a:t>
             </a:r>
           </a:p>
         </p:txBody>
@@ -7076,7 +7076,7 @@
         </p:nvSpPr>
         <p:spPr>
           <a:xfrm>
-            <a:off x="594360" y="3638549"/>
+            <a:off x="594360" y="3963924"/>
             <a:ext cx="10881360" cy="914400"/>
           </a:xfrm>
           <a:prstGeom prst="rect">
@@ -7099,7 +7099,7 @@
               </a:defRPr>
             </a:pPr>
             <a:r>
-              <a:t>Revisa dónde la tasa implica más abstenciones en la base observable.</a:t>
+              <a:t>6/6: núcleo robusto; 1/6–5/6: zona de revisión. Elegibilidad aparte. Las variantes comparten datos y pueden equivocarse juntas.</a:t>
             </a:r>
           </a:p>
         </p:txBody>
@@ -7112,8 +7112,8 @@
         </p:nvSpPr>
         <p:spPr>
           <a:xfrm>
-            <a:off x="594360" y="4165091"/>
-            <a:ext cx="10881360" cy="914400"/>
+            <a:off x="594360" y="6245352"/>
+            <a:ext cx="10881360" cy="411480"/>
           </a:xfrm>
           <a:prstGeom prst="rect">
             <a:avLst/>
@@ -7127,87 +7127,15 @@
           <a:lstStyle/>
           <a:p>
             <a:pPr>
-              <a:defRPr sz="2400" b="1">
-                <a:solidFill>
-                  <a:srgbClr val="10685F"/>
+              <a:defRPr sz="1000" b="0">
+                <a:solidFill>
+                  <a:srgbClr val="587177"/>
                 </a:solidFill>
                 <a:latin typeface="Segoe UI"/>
               </a:defRPr>
             </a:pPr>
             <a:r>
-              <a:t>Deterioro respecto al mismo tipo electoral</a:t>
-            </a:r>
-          </a:p>
-        </p:txBody>
-      </p:sp>
-      <p:sp>
-        <p:nvSpPr>
-          <p:cNvPr id="9" name="TextBox 8"/>
-          <p:cNvSpPr txBox="1"/>
-          <p:nvPr/>
-        </p:nvSpPr>
-        <p:spPr>
-          <a:xfrm>
-            <a:off x="594360" y="4738116"/>
-            <a:ext cx="10881360" cy="914400"/>
-          </a:xfrm>
-          <a:prstGeom prst="rect">
-            <a:avLst/>
-          </a:prstGeom>
-          <a:noFill/>
-        </p:spPr>
-        <p:txBody>
-          <a:bodyPr wrap="square" lIns="0" rIns="0" tIns="0" bIns="0">
-            <a:spAutoFit/>
-          </a:bodyPr>
-          <a:lstStyle/>
-          <a:p>
-            <a:pPr>
-              <a:defRPr sz="2100" b="0">
-                <a:solidFill>
-                  <a:srgbClr val="15353B"/>
-                </a:solidFill>
-                <a:latin typeface="Segoe UI"/>
-              </a:defRPr>
-            </a:pPr>
-            <a:r>
-              <a:t>Revisa el aumento estimado frente al antecedente comparable.</a:t>
-            </a:r>
-          </a:p>
-        </p:txBody>
-      </p:sp>
-      <p:sp>
-        <p:nvSpPr>
-          <p:cNvPr id="10" name="TextBox 9"/>
-          <p:cNvSpPr txBox="1"/>
-          <p:nvPr/>
-        </p:nvSpPr>
-        <p:spPr>
-          <a:xfrm>
-            <a:off x="594360" y="6245352"/>
-            <a:ext cx="10881360" cy="411480"/>
-          </a:xfrm>
-          <a:prstGeom prst="rect">
-            <a:avLst/>
-          </a:prstGeom>
-          <a:noFill/>
-        </p:spPr>
-        <p:txBody>
-          <a:bodyPr wrap="square" lIns="0" rIns="0" tIns="0" bIns="0">
-            <a:spAutoFit/>
-          </a:bodyPr>
-          <a:lstStyle/>
-          <a:p>
-            <a:pPr>
-              <a:defRPr sz="1000" b="0">
-                <a:solidFill>
-                  <a:srgbClr val="587177"/>
-                </a:solidFill>
-                <a:latin typeface="Segoe UI"/>
-              </a:defRPr>
-            </a:pPr>
-            <a:r>
-              <a:t>Dos métodos × NS 5/10/20: frecuencia topN y concordancia describen estabilidad. No expresan confianza calibrada.</a:t>
+              <a:t>Frecuencia descriptiva, no probabilidad de acierto. La frontera orienta revisión y propuesta de piloto.</a:t>
             </a:r>
           </a:p>
         </p:txBody>
@@ -7305,7 +7233,7 @@
               </a:defRPr>
             </a:pPr>
             <a:r>
-              <a:t>Prevención con una ficha verificable</a:t>
+              <a:t>Caso 23008: prioridad que requiere revisión</a:t>
             </a:r>
           </a:p>
         </p:txBody>
@@ -7333,7 +7261,7 @@
           <a:lstStyle/>
           <a:p>
             <a:pPr>
-              <a:defRPr sz="2600" b="1">
+              <a:defRPr sz="2400" b="1">
                 <a:solidFill>
                   <a:srgbClr val="10685F"/>
                 </a:solidFill>
@@ -7341,7 +7269,7 @@
               </a:defRPr>
             </a:pPr>
             <a:r>
-              <a:t>Cada municipio necesita una propuesta revisable</a:t>
+              <a:t>SOLIDARIDAD · catálogo histórico de Quintana Roo</a:t>
             </a:r>
           </a:p>
         </p:txBody>
@@ -7354,7 +7282,7 @@
         </p:nvSpPr>
         <p:spPr>
           <a:xfrm>
-            <a:off x="594360" y="2569971"/>
+            <a:off x="594360" y="2538983"/>
             <a:ext cx="10881360" cy="914400"/>
           </a:xfrm>
           <a:prstGeom prst="rect">
@@ -7369,7 +7297,7 @@
           <a:lstStyle/>
           <a:p>
             <a:pPr>
-              <a:defRPr sz="2200" b="0">
+              <a:defRPr sz="2100" b="0">
                 <a:solidFill>
                   <a:srgbClr val="15353B"/>
                 </a:solidFill>
@@ -7377,7 +7305,7 @@
               </a:defRPr>
             </a:pPr>
             <a:r>
-              <a:t>La ficha relaciona antecedentes observables con una acción de información electoral accesible o educación cívica.</a:t>
+              <a:t>Puesto Ridge 1; referencia 3. Estimación exploratoria 62.11%. Estabilidad 4/6: NS 2021 de 9.60% excluye variantes NS ≤5%.</a:t>
             </a:r>
           </a:p>
         </p:txBody>
@@ -7390,7 +7318,7 @@
         </p:nvSpPr>
         <p:spPr>
           <a:xfrm>
-            <a:off x="594360" y="3452875"/>
+            <a:off x="594360" y="3390899"/>
             <a:ext cx="10881360" cy="914400"/>
           </a:xfrm>
           <a:prstGeom prst="rect">
@@ -7405,7 +7333,7 @@
           <a:lstStyle/>
           <a:p>
             <a:pPr>
-              <a:defRPr sz="2200" b="0">
+              <a:defRPr sz="2100" b="0">
                 <a:solidFill>
                   <a:srgbClr val="15353B"/>
                 </a:solidFill>
@@ -7413,7 +7341,7 @@
               </a:defRPr>
             </a:pPr>
             <a:r>
-              <a:t>Registra responsable propuesto, personas alcanzadas, condiciones de aplicación y medición. El mecanismo esperado es una hipótesis.</a:t>
+              <a:t>Acción propuesta: talleres abiertos sobre requisitos y procedimiento. Educación cívica y junta local; sedes y capacidad por validar.</a:t>
             </a:r>
           </a:p>
         </p:txBody>
@@ -7426,7 +7354,7 @@
         </p:nvSpPr>
         <p:spPr>
           <a:xfrm>
-            <a:off x="594360" y="4335780"/>
+            <a:off x="594360" y="4242816"/>
             <a:ext cx="10881360" cy="914400"/>
           </a:xfrm>
           <a:prstGeom prst="rect">
@@ -7441,7 +7369,7 @@
           <a:lstStyle/>
           <a:p>
             <a:pPr>
-              <a:defRPr sz="2000" b="0">
+              <a:defRPr sz="2100" b="0">
                 <a:solidFill>
                   <a:srgbClr val="15353B"/>
                 </a:solidFill>
@@ -7449,7 +7377,7 @@
               </a:defRPr>
             </a:pPr>
             <a:r>
-              <a:t>Piloto propuesto: asignación aleatoria dentro de un conjunto elegible y balanceado alrededor del corte. Medir cobertura y participación.</a:t>
+              <a:t>1,000 alcanzados y respuesta supuesta 25%: 155.27 adicionales hipotéticos; 62.11% → 62.05%. Permanece alto.</a:t>
             </a:r>
           </a:p>
         </p:txBody>
@@ -7485,7 +7413,7 @@
               </a:defRPr>
             </a:pPr>
             <a:r>
-              <a:t>La proximidad del score no demuestra equivalencia. El prototipo no acredita impacto causal ni un diseño RDD.</a:t>
+              <a:t>Configuración nacional: catálogo constante, tasa, Ridge, 50 municipios, estabilidad Todas. Base SV+NV 2024: 255,362.</a:t>
             </a:r>
           </a:p>
         </p:txBody>
@@ -7583,7 +7511,7 @@
               </a:defRPr>
             </a:pPr>
             <a:r>
-              <a:t>Uso institucional con revisión humana</a:t>
+              <a:t>De la ficha a un plan verificable</a:t>
             </a:r>
           </a:p>
         </p:txBody>
@@ -7619,7 +7547,7 @@
               </a:defRPr>
             </a:pPr>
             <a:r>
-              <a:t>La vista por entidad resume capacidad y cobertura</a:t>
+              <a:t>Recursos, condiciones y medición</a:t>
             </a:r>
           </a:p>
         </p:txBody>
@@ -7647,7 +7575,7 @@
           <a:lstStyle/>
           <a:p>
             <a:pPr>
-              <a:defRPr sz="2200" b="0">
+              <a:defRPr sz="2100" b="0">
                 <a:solidFill>
                   <a:srgbClr val="15353B"/>
                 </a:solidFill>
@@ -7655,7 +7583,7 @@
               </a:defRPr>
             </a:pPr>
             <a:r>
-              <a:t>El área usuaria revisa calidad, concordancia de listas y viabilidad del alcance. La exportación conserva los supuestos de cada decisión.</a:t>
+              <a:t>Exportar acción, responsable propuesto, alcance, supuestos y estabilidad. Capacidad por municipios o por personas alcanzables.</a:t>
             </a:r>
           </a:p>
         </p:txBody>
@@ -7668,7 +7596,7 @@
         </p:nvSpPr>
         <p:spPr>
           <a:xfrm>
-            <a:off x="594360" y="3437381"/>
+            <a:off x="594360" y="3406393"/>
             <a:ext cx="10881360" cy="914400"/>
           </a:xfrm>
           <a:prstGeom prst="rect">
@@ -7683,7 +7611,7 @@
           <a:lstStyle/>
           <a:p>
             <a:pPr>
-              <a:defRPr sz="2200" b="0">
+              <a:defRPr sz="2100" b="0">
                 <a:solidFill>
                   <a:srgbClr val="15353B"/>
                 </a:solidFill>
@@ -7691,7 +7619,7 @@
               </a:defRPr>
             </a:pPr>
             <a:r>
-              <a:t>Las claves municipales permiten trazabilidad. Sin correspondencia verificada, el producto no atribuye municipios a distritos.</a:t>
+              <a:t>Registrar alcance único agregado, horas y conocimiento previo/posterior. El perfil joven orienta canales; no demuestra barreras.</a:t>
             </a:r>
           </a:p>
         </p:txBody>
@@ -7704,7 +7632,7 @@
         </p:nvSpPr>
         <p:spPr>
           <a:xfrm>
-            <a:off x="594360" y="4320286"/>
+            <a:off x="594360" y="4258310"/>
             <a:ext cx="10881360" cy="914400"/>
           </a:xfrm>
           <a:prstGeom prst="rect">
@@ -7727,7 +7655,7 @@
               </a:defRPr>
             </a:pPr>
             <a:r>
-              <a:t>La demo local y los datos agregados permiten inspección sin dependencias remotas.</a:t>
+              <a:t>Validar límites, sedes y atribuciones. Un efecto sobre participación requiere evaluación comparativa y protocolo previo.</a:t>
             </a:r>
           </a:p>
         </p:txBody>
@@ -7763,7 +7691,7 @@
               </a:defRPr>
             </a:pPr>
             <a:r>
-              <a:t>Límites: pocas ocasiones electorales, cohortes filtradas y armonización territorial pendiente.</a:t>
+              <a:t>Caso completo: entrega/CASO_MUNICIPAL.md. Guion y demo de tres pasos: entrega/GUION_PRESENTACION.md.</a:t>
             </a:r>
           </a:p>
         </p:txBody>

--- a/02_Prediccion_y_escenarios_de_riesgo/entrega/presentacion/Umbral_presentacion.pptx
+++ b/02_Prediccion_y_escenarios_de_riesgo/entrega/presentacion/Umbral_presentacion.pptx
@@ -467,7 +467,7 @@
 </file>
 
 <file path=ppt/notesSlides/notesSlide1.xml><?xml version="1.0" encoding="utf-8"?>
-<p:notes xmlns:a="http://schemas.openxmlformats.org/drawingml/2006/main" xmlns:p="http://schemas.openxmlformats.org/presentationml/2006/main" xmlns:r="http://schemas.openxmlformats.org/officeDocument/2006/relationships">
+<p:notes xmlns:a="http://schemas.openxmlformats.org/drawingml/2006/main" xmlns:p="http://schemas.openxmlformats.org/presentationml/2006/main">
   <p:cSld>
     <p:spTree>
       <p:nvGrpSpPr>
@@ -511,17 +511,17 @@
           <a:lstStyle/>
           <a:p>
             <a:r>
-              <a:t>Datos agregados CCPC 2009–2024. Prototipo para revisión institucional.</a:t>
-            </a:r>
-          </a:p>
-          <a:p>
-            <a:r>
-              <a:t>Fuentes primarias: https://ine.mx/transparencia/datos-abiertos/visualizacion-datos/conteos-censales-participacion/</a:t>
-            </a:r>
-          </a:p>
-          <a:p>
-            <a:r>
-              <a:t>Convocatoria: https://ine.mx/wp-content/uploads/2026/09/Convocatoria_Hackaton-1.pdf</a:t>
+              <a:t/>
+            </a:r>
+          </a:p>
+          <a:p>
+            <a:r>
+              <a:t/>
+            </a:r>
+          </a:p>
+          <a:p>
+            <a:r>
+              <a:t>Datos agregados CCPC 2009–2024. Prototipo para revisión institucional. Fuentes primarias: https://ine.mx/transparencia/datos-abiertos/visualizacion-datos/conteos-censales-participacion/ Convocatoria: https://ine.mx/wp-content/uploads/2026/09/Convocatoria_Hackaton-1.pdf</a:t>
             </a:r>
           </a:p>
         </p:txBody>
@@ -547,7 +547,7 @@
 </file>
 
 <file path=ppt/notesSlides/notesSlide10.xml><?xml version="1.0" encoding="utf-8"?>
-<p:notes xmlns:a="http://schemas.openxmlformats.org/drawingml/2006/main" xmlns:p="http://schemas.openxmlformats.org/presentationml/2006/main" xmlns:r="http://schemas.openxmlformats.org/officeDocument/2006/relationships">
+<p:notes xmlns:a="http://schemas.openxmlformats.org/drawingml/2006/main" xmlns:p="http://schemas.openxmlformats.org/presentationml/2006/main">
   <p:cSld>
     <p:spTree>
       <p:nvGrpSpPr>
@@ -591,17 +591,17 @@
           <a:lstStyle/>
           <a:p>
             <a:r>
-              <a:t>2024 es presidencial y no valida directamente 2027. No se promete superioridad predictiva o efectividad preventiva.</a:t>
-            </a:r>
-          </a:p>
-          <a:p>
-            <a:r>
-              <a:t>Fuentes primarias: https://ine.mx/transparencia/datos-abiertos/visualizacion-datos/conteos-censales-participacion/</a:t>
-            </a:r>
-          </a:p>
-          <a:p>
-            <a:r>
-              <a:t>Convocatoria: https://ine.mx/wp-content/uploads/2026/09/Convocatoria_Hackaton-1.pdf</a:t>
+              <a:t/>
+            </a:r>
+          </a:p>
+          <a:p>
+            <a:r>
+              <a:t/>
+            </a:r>
+          </a:p>
+          <a:p>
+            <a:r>
+              <a:t>2024 es presidencial y no valida directamente 2027. No se promete superioridad predictiva o efectividad preventiva. Fuentes primarias: https://ine.mx/transparencia/datos-abiertos/visualizacion-datos/conteos-censales-participacion/ Convocatoria: https://ine.mx/wp-content/uploads/2026/09/Convocatoria_Hackaton-1.pdf</a:t>
             </a:r>
           </a:p>
         </p:txBody>
@@ -627,7 +627,7 @@
 </file>
 
 <file path=ppt/notesSlides/notesSlide2.xml><?xml version="1.0" encoding="utf-8"?>
-<p:notes xmlns:a="http://schemas.openxmlformats.org/drawingml/2006/main" xmlns:p="http://schemas.openxmlformats.org/presentationml/2006/main" xmlns:r="http://schemas.openxmlformats.org/officeDocument/2006/relationships">
+<p:notes xmlns:a="http://schemas.openxmlformats.org/drawingml/2006/main" xmlns:p="http://schemas.openxmlformats.org/presentationml/2006/main">
   <p:cSld>
     <p:spTree>
       <p:nvGrpSpPr>
@@ -671,17 +671,17 @@
           <a:lstStyle/>
           <a:p>
             <a:r>
-              <a:t>Fuente: convocatoria INE, pp. 3–5. https://ine.mx/wp-content/uploads/2026/09/Convocatoria_Hackaton-1.pdf</a:t>
-            </a:r>
-          </a:p>
-          <a:p>
-            <a:r>
-              <a:t>Fuentes primarias: https://ine.mx/transparencia/datos-abiertos/visualizacion-datos/conteos-censales-participacion/</a:t>
-            </a:r>
-          </a:p>
-          <a:p>
-            <a:r>
-              <a:t>Convocatoria: https://ine.mx/wp-content/uploads/2026/09/Convocatoria_Hackaton-1.pdf</a:t>
+              <a:t/>
+            </a:r>
+          </a:p>
+          <a:p>
+            <a:r>
+              <a:t/>
+            </a:r>
+          </a:p>
+          <a:p>
+            <a:r>
+              <a:t>País: México, municipios con estimación incluidos. Los filtros y exclusiones delimitan el alcance. Fuentes primarias: https://ine.mx/transparencia/datos-abiertos/visualizacion-datos/conteos-censales-participacion/ Convocatoria: https://ine.mx/wp-content/uploads/2026/09/Convocatoria_Hackaton-1.pdf</a:t>
             </a:r>
           </a:p>
         </p:txBody>
@@ -707,7 +707,7 @@
 </file>
 
 <file path=ppt/notesSlides/notesSlide3.xml><?xml version="1.0" encoding="utf-8"?>
-<p:notes xmlns:a="http://schemas.openxmlformats.org/drawingml/2006/main" xmlns:p="http://schemas.openxmlformats.org/presentationml/2006/main" xmlns:r="http://schemas.openxmlformats.org/officeDocument/2006/relationships">
+<p:notes xmlns:a="http://schemas.openxmlformats.org/drawingml/2006/main" xmlns:p="http://schemas.openxmlformats.org/presentationml/2006/main">
   <p:cSld>
     <p:spTree>
       <p:nvGrpSpPr>
@@ -751,17 +751,17 @@
           <a:lstStyle/>
           <a:p>
             <a:r>
-              <a:t>Fuente: auditoría y base municipal del proyecto. CCPC: https://ine.mx/transparencia/datos-abiertos/visualizacion-datos/conteos-censales-participacion/</a:t>
-            </a:r>
-          </a:p>
-          <a:p>
-            <a:r>
-              <a:t>Fuentes primarias: https://ine.mx/transparencia/datos-abiertos/visualizacion-datos/conteos-censales-participacion/</a:t>
-            </a:r>
-          </a:p>
-          <a:p>
-            <a:r>
-              <a:t>Convocatoria: https://ine.mx/wp-content/uploads/2026/09/Convocatoria_Hackaton-1.pdf</a:t>
+              <a:t/>
+            </a:r>
+          </a:p>
+          <a:p>
+            <a:r>
+              <a:t/>
+            </a:r>
+          </a:p>
+          <a:p>
+            <a:r>
+              <a:t>Fuente: auditoría y base municipal del proyecto. CCPC: https://ine.mx/transparencia/datos-abiertos/visualizacion-datos/conteos-censales-participacion/ Fuentes primarias: https://ine.mx/transparencia/datos-abiertos/visualizacion-datos/conteos-censales-participacion/ Convocatoria: https://ine.mx/wp-content/uploads/2026/09/Convocatoria_Hackaton-1.pdf</a:t>
             </a:r>
           </a:p>
         </p:txBody>
@@ -787,7 +787,7 @@
 </file>
 
 <file path=ppt/notesSlides/notesSlide4.xml><?xml version="1.0" encoding="utf-8"?>
-<p:notes xmlns:a="http://schemas.openxmlformats.org/drawingml/2006/main" xmlns:p="http://schemas.openxmlformats.org/presentationml/2006/main" xmlns:r="http://schemas.openxmlformats.org/officeDocument/2006/relationships">
+<p:notes xmlns:a="http://schemas.openxmlformats.org/drawingml/2006/main" xmlns:p="http://schemas.openxmlformats.org/presentationml/2006/main">
   <p:cSld>
     <p:spTree>
       <p:nvGrpSpPr>
@@ -831,17 +831,17 @@
           <a:lstStyle/>
           <a:p>
             <a:r>
-              <a:t>Fuente: modelado/METODOLOGIA.md y modelado/salidas/metricas.json. No hay ajuste para mejorar 2024.</a:t>
-            </a:r>
-          </a:p>
-          <a:p>
-            <a:r>
-              <a:t>Fuentes primarias: https://ine.mx/transparencia/datos-abiertos/visualizacion-datos/conteos-censales-participacion/</a:t>
-            </a:r>
-          </a:p>
-          <a:p>
-            <a:r>
-              <a:t>Convocatoria: https://ine.mx/wp-content/uploads/2026/09/Convocatoria_Hackaton-1.pdf</a:t>
+              <a:t/>
+            </a:r>
+          </a:p>
+          <a:p>
+            <a:r>
+              <a:t/>
+            </a:r>
+          </a:p>
+          <a:p>
+            <a:r>
+              <a:t>Fuente: modelado/METODOLOGIA.md y modelado/salidas/metricas.json. No hay ajuste para mejorar 2024. Fuentes primarias: https://ine.mx/transparencia/datos-abiertos/visualizacion-datos/conteos-censales-participacion/ Convocatoria: https://ine.mx/wp-content/uploads/2026/09/Convocatoria_Hackaton-1.pdf</a:t>
             </a:r>
           </a:p>
         </p:txBody>
@@ -867,7 +867,7 @@
 </file>
 
 <file path=ppt/notesSlides/notesSlide5.xml><?xml version="1.0" encoding="utf-8"?>
-<p:notes xmlns:a="http://schemas.openxmlformats.org/drawingml/2006/main" xmlns:p="http://schemas.openxmlformats.org/presentationml/2006/main" xmlns:r="http://schemas.openxmlformats.org/officeDocument/2006/relationships">
+<p:notes xmlns:a="http://schemas.openxmlformats.org/drawingml/2006/main" xmlns:p="http://schemas.openxmlformats.org/presentationml/2006/main">
   <p:cSld>
     <p:spTree>
       <p:nvGrpSpPr>
@@ -911,17 +911,17 @@
           <a:lstStyle/>
           <a:p>
             <a:r>
-              <a:t>MAE en puntos porcentuales. Ponderación por SV+NV observado del objetivo. Top50 dentro de cada cohorte evaluable.</a:t>
-            </a:r>
-          </a:p>
-          <a:p>
-            <a:r>
-              <a:t>Fuentes primarias: https://ine.mx/transparencia/datos-abiertos/visualizacion-datos/conteos-censales-participacion/</a:t>
-            </a:r>
-          </a:p>
-          <a:p>
-            <a:r>
-              <a:t>Convocatoria: https://ine.mx/wp-content/uploads/2026/09/Convocatoria_Hackaton-1.pdf</a:t>
+              <a:t/>
+            </a:r>
+          </a:p>
+          <a:p>
+            <a:r>
+              <a:t/>
+            </a:r>
+          </a:p>
+          <a:p>
+            <a:r>
+              <a:t>MAE en puntos porcentuales. Ponderación por SV+NV observado del objetivo. Top50 dentro de cada cohorte evaluable. Fuentes primarias: https://ine.mx/transparencia/datos-abiertos/visualizacion-datos/conteos-censales-participacion/ Convocatoria: https://ine.mx/wp-content/uploads/2026/09/Convocatoria_Hackaton-1.pdf</a:t>
             </a:r>
           </a:p>
         </p:txBody>
@@ -947,7 +947,7 @@
 </file>
 
 <file path=ppt/notesSlides/notesSlide6.xml><?xml version="1.0" encoding="utf-8"?>
-<p:notes xmlns:a="http://schemas.openxmlformats.org/drawingml/2006/main" xmlns:p="http://schemas.openxmlformats.org/presentationml/2006/main" xmlns:r="http://schemas.openxmlformats.org/officeDocument/2006/relationships">
+<p:notes xmlns:a="http://schemas.openxmlformats.org/drawingml/2006/main" xmlns:p="http://schemas.openxmlformats.org/presentationml/2006/main">
   <p:cSld>
     <p:spTree>
       <p:nvGrpSpPr>
@@ -991,17 +991,17 @@
           <a:lstStyle/>
           <a:p>
             <a:r>
-              <a:t>Capturas de la demo corregida. El escenario es hipotético, sin efecto causal demostrado ni población 2027 proyectada.</a:t>
-            </a:r>
-          </a:p>
-          <a:p>
-            <a:r>
-              <a:t>Fuentes primarias: https://ine.mx/transparencia/datos-abiertos/visualizacion-datos/conteos-censales-participacion/</a:t>
-            </a:r>
-          </a:p>
-          <a:p>
-            <a:r>
-              <a:t>Convocatoria: https://ine.mx/wp-content/uploads/2026/09/Convocatoria_Hackaton-1.pdf</a:t>
+              <a:t/>
+            </a:r>
+          </a:p>
+          <a:p>
+            <a:r>
+              <a:t/>
+            </a:r>
+          </a:p>
+          <a:p>
+            <a:r>
+              <a:t>DOI: 10.1017/S0007123424000504; 10.1007/s11109-026-10121-2; 10.1177/0956797609359326. Traslado a México: supuesto. Fuentes primarias: https://ine.mx/transparencia/datos-abiertos/visualizacion-datos/conteos-censales-participacion/ Convocatoria: https://ine.mx/wp-content/uploads/2026/09/Convocatoria_Hackaton-1.pdf</a:t>
             </a:r>
           </a:p>
         </p:txBody>
@@ -1027,7 +1027,7 @@
 </file>
 
 <file path=ppt/notesSlides/notesSlide7.xml><?xml version="1.0" encoding="utf-8"?>
-<p:notes xmlns:a="http://schemas.openxmlformats.org/drawingml/2006/main" xmlns:p="http://schemas.openxmlformats.org/presentationml/2006/main" xmlns:r="http://schemas.openxmlformats.org/officeDocument/2006/relationships">
+<p:notes xmlns:a="http://schemas.openxmlformats.org/drawingml/2006/main" xmlns:p="http://schemas.openxmlformats.org/presentationml/2006/main">
   <p:cSld>
     <p:spTree>
       <p:nvGrpSpPr>
@@ -1071,17 +1071,17 @@
           <a:lstStyle/>
           <a:p>
             <a:r>
-              <a:t>Frecuencia descriptiva, no probabilidad de acierto. La frontera orienta revisión y propuesta de piloto.</a:t>
-            </a:r>
-          </a:p>
-          <a:p>
-            <a:r>
-              <a:t>Fuentes primarias: https://ine.mx/transparencia/datos-abiertos/visualizacion-datos/conteos-censales-participacion/</a:t>
-            </a:r>
-          </a:p>
-          <a:p>
-            <a:r>
-              <a:t>Convocatoria: https://ine.mx/wp-content/uploads/2026/09/Convocatoria_Hackaton-1.pdf</a:t>
+              <a:t/>
+            </a:r>
+          </a:p>
+          <a:p>
+            <a:r>
+              <a:t/>
+            </a:r>
+          </a:p>
+          <a:p>
+            <a:r>
+              <a:t>Frecuencia descriptiva. Las variantes comparten datos y pueden equivocarse juntas. Fuentes primarias: https://ine.mx/transparencia/datos-abiertos/visualizacion-datos/conteos-censales-participacion/ Convocatoria: https://ine.mx/wp-content/uploads/2026/09/Convocatoria_Hackaton-1.pdf</a:t>
             </a:r>
           </a:p>
         </p:txBody>
@@ -1107,7 +1107,7 @@
 </file>
 
 <file path=ppt/notesSlides/notesSlide8.xml><?xml version="1.0" encoding="utf-8"?>
-<p:notes xmlns:a="http://schemas.openxmlformats.org/drawingml/2006/main" xmlns:p="http://schemas.openxmlformats.org/presentationml/2006/main" xmlns:r="http://schemas.openxmlformats.org/officeDocument/2006/relationships">
+<p:notes xmlns:a="http://schemas.openxmlformats.org/drawingml/2006/main" xmlns:p="http://schemas.openxmlformats.org/presentationml/2006/main">
   <p:cSld>
     <p:spTree>
       <p:nvGrpSpPr>
@@ -1151,17 +1151,17 @@
           <a:lstStyle/>
           <a:p>
             <a:r>
-              <a:t>Configuración nacional: catálogo constante, tasa, Ridge, 50 municipios, estabilidad Todas. Base SV+NV 2024: 255,362.</a:t>
-            </a:r>
-          </a:p>
-          <a:p>
-            <a:r>
-              <a:t>Fuentes primarias: https://ine.mx/transparencia/datos-abiertos/visualizacion-datos/conteos-censales-participacion/</a:t>
-            </a:r>
-          </a:p>
-          <a:p>
-            <a:r>
-              <a:t>Convocatoria: https://ine.mx/wp-content/uploads/2026/09/Convocatoria_Hackaton-1.pdf</a:t>
+              <a:t/>
+            </a:r>
+          </a:p>
+          <a:p>
+            <a:r>
+              <a:t/>
+            </a:r>
+          </a:p>
+          <a:p>
+            <a:r>
+              <a:t>Fuente: entrega/caso_municipal.json. SV+NV 2024: 255,362. SMS: Lindgren, Nyman y Oskarsson (2025), DOI 10.1017/S0007123424000504. Fuentes primarias: https://ine.mx/transparencia/datos-abiertos/visualizacion-datos/conteos-censales-participacion/ Convocatoria: https://ine.mx/wp-content/uploads/2026/09/Convocatoria_Hackaton-1.pdf</a:t>
             </a:r>
           </a:p>
         </p:txBody>
@@ -1187,7 +1187,7 @@
 </file>
 
 <file path=ppt/notesSlides/notesSlide9.xml><?xml version="1.0" encoding="utf-8"?>
-<p:notes xmlns:a="http://schemas.openxmlformats.org/drawingml/2006/main" xmlns:p="http://schemas.openxmlformats.org/presentationml/2006/main" xmlns:r="http://schemas.openxmlformats.org/officeDocument/2006/relationships">
+<p:notes xmlns:a="http://schemas.openxmlformats.org/drawingml/2006/main" xmlns:p="http://schemas.openxmlformats.org/presentationml/2006/main">
   <p:cSld>
     <p:spTree>
       <p:nvGrpSpPr>
@@ -1231,17 +1231,17 @@
           <a:lstStyle/>
           <a:p>
             <a:r>
-              <a:t>Caso completo: entrega/CASO_MUNICIPAL.md. Guion y demo de tres pasos: entrega/GUION_PRESENTACION.md.</a:t>
-            </a:r>
-          </a:p>
-          <a:p>
-            <a:r>
-              <a:t>Fuentes primarias: https://ine.mx/transparencia/datos-abiertos/visualizacion-datos/conteos-censales-participacion/</a:t>
-            </a:r>
-          </a:p>
-          <a:p>
-            <a:r>
-              <a:t>Convocatoria: https://ine.mx/wp-content/uploads/2026/09/Convocatoria_Hackaton-1.pdf</a:t>
+              <a:t/>
+            </a:r>
+          </a:p>
+          <a:p>
+            <a:r>
+              <a:t/>
+            </a:r>
+          </a:p>
+          <a:p>
+            <a:r>
+              <a:t>Caso completo: entrega/CASO_MUNICIPAL.md. Guion y demo de tres pasos: entrega/GUION_PRESENTACION.md. Fuentes primarias: https://ine.mx/transparencia/datos-abiertos/visualizacion-datos/conteos-censales-participacion/ Convocatoria: https://ine.mx/wp-content/uploads/2026/09/Convocatoria_Hackaton-1.pdf</a:t>
             </a:r>
           </a:p>
         </p:txBody>
@@ -4238,7 +4238,7 @@
 </file>
 
 <file path=ppt/slides/slide1.xml><?xml version="1.0" encoding="utf-8"?>
-<p:sld xmlns:a="http://schemas.openxmlformats.org/drawingml/2006/main" xmlns:p="http://schemas.openxmlformats.org/presentationml/2006/main" xmlns:r="http://schemas.openxmlformats.org/officeDocument/2006/relationships">
+<p:sld xmlns:a="http://schemas.openxmlformats.org/drawingml/2006/main" xmlns:p="http://schemas.openxmlformats.org/presentationml/2006/main">
   <p:cSld>
     <p:bg>
       <p:bgPr>
@@ -4257,7 +4257,7 @@
       <p:grpSpPr/>
       <p:sp>
         <p:nvSpPr>
-          <p:cNvPr id="2" name="TextBox 1"/>
+          <p:cNvPr id="3" name="Texto editable"/>
           <p:cNvSpPr txBox="1"/>
           <p:nvPr/>
         </p:nvSpPr>
@@ -4277,15 +4277,13 @@
           </a:bodyPr>
           <a:lstStyle/>
           <a:p>
-            <a:pPr>
-              <a:defRPr sz="1200" b="1">
+            <a:r>
+              <a:rPr sz="1200" b="1">
                 <a:solidFill>
                   <a:srgbClr val="10685F"/>
                 </a:solidFill>
                 <a:latin typeface="Segoe UI"/>
-              </a:defRPr>
-            </a:pPr>
-            <a:r>
+              </a:rPr>
               <a:t>UMBRAL · 01</a:t>
             </a:r>
           </a:p>
@@ -4293,7 +4291,7 @@
       </p:sp>
       <p:sp>
         <p:nvSpPr>
-          <p:cNvPr id="3" name="TextBox 2"/>
+          <p:cNvPr id="4" name="Texto editable"/>
           <p:cNvSpPr txBox="1"/>
           <p:nvPr/>
         </p:nvSpPr>
@@ -4313,15 +4311,13 @@
           </a:bodyPr>
           <a:lstStyle/>
           <a:p>
-            <a:pPr>
-              <a:defRPr sz="4400" b="1">
+            <a:r>
+              <a:rPr sz="4400" b="1">
                 <a:solidFill>
                   <a:srgbClr val="10685F"/>
                 </a:solidFill>
                 <a:latin typeface="Segoe UI"/>
-              </a:defRPr>
-            </a:pPr>
-            <a:r>
+              </a:rPr>
               <a:t>UMBRAL</a:t>
             </a:r>
           </a:p>
@@ -4329,7 +4325,7 @@
       </p:sp>
       <p:sp>
         <p:nvSpPr>
-          <p:cNvPr id="4" name="TextBox 3"/>
+          <p:cNvPr id="5" name="Texto editable"/>
           <p:cNvSpPr txBox="1"/>
           <p:nvPr/>
         </p:nvSpPr>
@@ -4349,15 +4345,13 @@
           </a:bodyPr>
           <a:lstStyle/>
           <a:p>
-            <a:pPr>
-              <a:defRPr sz="2800" b="1">
+            <a:r>
+              <a:rPr sz="2800" b="1">
                 <a:solidFill>
                   <a:srgbClr val="10685F"/>
                 </a:solidFill>
                 <a:latin typeface="Segoe UI"/>
-              </a:defRPr>
-            </a:pPr>
-            <a:r>
+              </a:rPr>
               <a:t>Atlas de decisión municipal</a:t>
             </a:r>
           </a:p>
@@ -4365,7 +4359,7 @@
       </p:sp>
       <p:sp>
         <p:nvSpPr>
-          <p:cNvPr id="5" name="TextBox 4"/>
+          <p:cNvPr id="6" name="Texto editable"/>
           <p:cNvSpPr txBox="1"/>
           <p:nvPr/>
         </p:nvSpPr>
@@ -4385,15 +4379,13 @@
           </a:bodyPr>
           <a:lstStyle/>
           <a:p>
-            <a:pPr>
-              <a:defRPr sz="2200" b="0">
+            <a:r>
+              <a:rPr sz="2200" b="0">
                 <a:solidFill>
                   <a:srgbClr val="15353B"/>
                 </a:solidFill>
                 <a:latin typeface="Segoe UI"/>
-              </a:defRPr>
-            </a:pPr>
-            <a:r>
+              </a:rPr>
               <a:t>Revisión territorial con evidencia, capacidad y supuestos visibles</a:t>
             </a:r>
           </a:p>
@@ -4401,13 +4393,13 @@
       </p:sp>
       <p:sp>
         <p:nvSpPr>
-          <p:cNvPr id="6" name="TextBox 5"/>
+          <p:cNvPr id="7" name="Texto editable"/>
           <p:cNvSpPr txBox="1"/>
           <p:nvPr/>
         </p:nvSpPr>
         <p:spPr>
           <a:xfrm>
-            <a:off x="594360" y="3554475"/>
+            <a:off x="594360" y="3554476"/>
             <a:ext cx="10881360" cy="914400"/>
           </a:xfrm>
           <a:prstGeom prst="rect">
@@ -4421,15 +4413,13 @@
           </a:bodyPr>
           <a:lstStyle/>
           <a:p>
-            <a:pPr>
-              <a:defRPr sz="1800" b="0">
+            <a:r>
+              <a:rPr sz="1800" b="0">
                 <a:solidFill>
                   <a:srgbClr val="15353B"/>
                 </a:solidFill>
                 <a:latin typeface="Segoe UI"/>
-              </a:defRPr>
-            </a:pPr>
-            <a:r>
+              </a:rPr>
               <a:t>Tecnocalidos · Hackathon INE 2026 · Track 2</a:t>
             </a:r>
           </a:p>
@@ -4437,13 +4427,13 @@
       </p:sp>
       <p:sp>
         <p:nvSpPr>
-          <p:cNvPr id="7" name="TextBox 6"/>
+          <p:cNvPr id="8" name="Texto editable"/>
           <p:cNvSpPr txBox="1"/>
           <p:nvPr/>
         </p:nvSpPr>
         <p:spPr>
           <a:xfrm>
-            <a:off x="594360" y="4034535"/>
+            <a:off x="594360" y="4034536"/>
             <a:ext cx="10881360" cy="914400"/>
           </a:xfrm>
           <a:prstGeom prst="rect">
@@ -4457,15 +4447,13 @@
           </a:bodyPr>
           <a:lstStyle/>
           <a:p>
-            <a:pPr>
-              <a:defRPr sz="1700" b="0">
+            <a:r>
+              <a:rPr sz="1700" b="0">
                 <a:solidFill>
                   <a:srgbClr val="15353B"/>
                 </a:solidFill>
                 <a:latin typeface="Segoe UI"/>
-              </a:defRPr>
-            </a:pPr>
-            <a:r>
+              </a:rPr>
               <a:t>Martin Isai Nuñez Villeda y Cesar Donnet Hernandez Gastelum</a:t>
             </a:r>
           </a:p>
@@ -4473,13 +4461,13 @@
       </p:sp>
       <p:sp>
         <p:nvSpPr>
-          <p:cNvPr id="8" name="TextBox 7"/>
+          <p:cNvPr id="9" name="Texto editable"/>
           <p:cNvSpPr txBox="1"/>
           <p:nvPr/>
         </p:nvSpPr>
         <p:spPr>
           <a:xfrm>
-            <a:off x="594360" y="4499101"/>
+            <a:off x="594360" y="4499102"/>
             <a:ext cx="10881360" cy="914400"/>
           </a:xfrm>
           <a:prstGeom prst="rect">
@@ -4493,15 +4481,13 @@
           </a:bodyPr>
           <a:lstStyle/>
           <a:p>
-            <a:pPr>
-              <a:defRPr sz="1700" b="0">
+            <a:r>
+              <a:rPr sz="1700" b="0">
                 <a:solidFill>
                   <a:srgbClr val="15353B"/>
                 </a:solidFill>
                 <a:latin typeface="Segoe UI"/>
-              </a:defRPr>
-            </a:pPr>
-            <a:r>
+              </a:rPr>
               <a:t>Versión técnica · 6 de octubre de 2026</a:t>
             </a:r>
           </a:p>
@@ -4509,7 +4495,7 @@
       </p:sp>
       <p:sp>
         <p:nvSpPr>
-          <p:cNvPr id="9" name="TextBox 8"/>
+          <p:cNvPr id="10" name="Texto editable"/>
           <p:cNvSpPr txBox="1"/>
           <p:nvPr/>
         </p:nvSpPr>
@@ -4529,15 +4515,13 @@
           </a:bodyPr>
           <a:lstStyle/>
           <a:p>
-            <a:pPr>
-              <a:defRPr sz="1000" b="0">
+            <a:r>
+              <a:rPr sz="1000" b="0">
                 <a:solidFill>
                   <a:srgbClr val="587177"/>
                 </a:solidFill>
                 <a:latin typeface="Segoe UI"/>
-              </a:defRPr>
-            </a:pPr>
-            <a:r>
+              </a:rPr>
               <a:t>Datos agregados CCPC 2009–2024. Prototipo para revisión institucional.</a:t>
             </a:r>
           </a:p>
@@ -4552,7 +4536,7 @@
 </file>
 
 <file path=ppt/slides/slide10.xml><?xml version="1.0" encoding="utf-8"?>
-<p:sld xmlns:a="http://schemas.openxmlformats.org/drawingml/2006/main" xmlns:p="http://schemas.openxmlformats.org/presentationml/2006/main" xmlns:r="http://schemas.openxmlformats.org/officeDocument/2006/relationships">
+<p:sld xmlns:a="http://schemas.openxmlformats.org/drawingml/2006/main" xmlns:p="http://schemas.openxmlformats.org/presentationml/2006/main">
   <p:cSld>
     <p:bg>
       <p:bgPr>
@@ -4571,7 +4555,7 @@
       <p:grpSpPr/>
       <p:sp>
         <p:nvSpPr>
-          <p:cNvPr id="2" name="TextBox 1"/>
+          <p:cNvPr id="3" name="Texto editable"/>
           <p:cNvSpPr txBox="1"/>
           <p:nvPr/>
         </p:nvSpPr>
@@ -4591,15 +4575,13 @@
           </a:bodyPr>
           <a:lstStyle/>
           <a:p>
-            <a:pPr>
-              <a:defRPr sz="1200" b="1">
+            <a:r>
+              <a:rPr sz="1200" b="1">
                 <a:solidFill>
                   <a:srgbClr val="10685F"/>
                 </a:solidFill>
                 <a:latin typeface="Segoe UI"/>
-              </a:defRPr>
-            </a:pPr>
-            <a:r>
+              </a:rPr>
               <a:t>UMBRAL · 10</a:t>
             </a:r>
           </a:p>
@@ -4607,7 +4589,7 @@
       </p:sp>
       <p:sp>
         <p:nvSpPr>
-          <p:cNvPr id="3" name="TextBox 2"/>
+          <p:cNvPr id="4" name="Texto editable"/>
           <p:cNvSpPr txBox="1"/>
           <p:nvPr/>
         </p:nvSpPr>
@@ -4627,15 +4609,13 @@
           </a:bodyPr>
           <a:lstStyle/>
           <a:p>
-            <a:pPr>
-              <a:defRPr sz="3200" b="1">
+            <a:r>
+              <a:rPr sz="3200" b="1">
                 <a:solidFill>
                   <a:srgbClr val="15353B"/>
                 </a:solidFill>
                 <a:latin typeface="Segoe UI"/>
-              </a:defRPr>
-            </a:pPr>
-            <a:r>
+              </a:rPr>
               <a:t>Siguiente decisión: un piloto acotado</a:t>
             </a:r>
           </a:p>
@@ -4643,7 +4623,7 @@
       </p:sp>
       <p:sp>
         <p:nvSpPr>
-          <p:cNvPr id="4" name="TextBox 3"/>
+          <p:cNvPr id="5" name="Texto editable"/>
           <p:cNvSpPr txBox="1"/>
           <p:nvPr/>
         </p:nvSpPr>
@@ -4663,15 +4643,13 @@
           </a:bodyPr>
           <a:lstStyle/>
           <a:p>
-            <a:pPr>
-              <a:defRPr sz="2600" b="1">
+            <a:r>
+              <a:rPr sz="2600" b="1">
                 <a:solidFill>
                   <a:srgbClr val="10685F"/>
                 </a:solidFill>
                 <a:latin typeface="Segoe UI"/>
-              </a:defRPr>
-            </a:pPr>
-            <a:r>
+              </a:rPr>
               <a:t>Validación con el área usuaria</a:t>
             </a:r>
           </a:p>
@@ -4679,13 +4657,13 @@
       </p:sp>
       <p:sp>
         <p:nvSpPr>
-          <p:cNvPr id="5" name="TextBox 4"/>
+          <p:cNvPr id="6" name="Texto editable"/>
           <p:cNvSpPr txBox="1"/>
           <p:nvPr/>
         </p:nvSpPr>
         <p:spPr>
           <a:xfrm>
-            <a:off x="594360" y="2569971"/>
+            <a:off x="594360" y="2569972"/>
             <a:ext cx="10881360" cy="914400"/>
           </a:xfrm>
           <a:prstGeom prst="rect">
@@ -4699,15 +4677,13 @@
           </a:bodyPr>
           <a:lstStyle/>
           <a:p>
-            <a:pPr>
-              <a:defRPr sz="2200" b="0">
+            <a:r>
+              <a:rPr sz="2200" b="0">
                 <a:solidFill>
                   <a:srgbClr val="15353B"/>
                 </a:solidFill>
                 <a:latin typeface="Segoe UI"/>
-              </a:defRPr>
-            </a:pPr>
-            <a:r>
+              </a:rPr>
               <a:t>Acordar objetivo de priorización, capacidad real y protocolo de revisión territorial. Elegir acciones con cobertura que pueda medirse.</a:t>
             </a:r>
           </a:p>
@@ -4715,13 +4691,13 @@
       </p:sp>
       <p:sp>
         <p:nvSpPr>
-          <p:cNvPr id="6" name="TextBox 5"/>
+          <p:cNvPr id="7" name="Texto editable"/>
           <p:cNvSpPr txBox="1"/>
           <p:nvPr/>
         </p:nvSpPr>
         <p:spPr>
           <a:xfrm>
-            <a:off x="594360" y="3452875"/>
+            <a:off x="594360" y="3452876"/>
             <a:ext cx="10881360" cy="914400"/>
           </a:xfrm>
           <a:prstGeom prst="rect">
@@ -4735,15 +4711,13 @@
           </a:bodyPr>
           <a:lstStyle/>
           <a:p>
-            <a:pPr>
-              <a:defRPr sz="2600" b="1">
+            <a:r>
+              <a:rPr sz="2600" b="1">
                 <a:solidFill>
                   <a:srgbClr val="10685F"/>
                 </a:solidFill>
                 <a:latin typeface="Segoe UI"/>
-              </a:defRPr>
-            </a:pPr>
-            <a:r>
+              </a:rPr>
               <a:t>Evaluación antes de ampliar</a:t>
             </a:r>
           </a:p>
@@ -4751,7 +4725,7 @@
       </p:sp>
       <p:sp>
         <p:nvSpPr>
-          <p:cNvPr id="7" name="TextBox 6"/>
+          <p:cNvPr id="8" name="Texto editable"/>
           <p:cNvSpPr txBox="1"/>
           <p:nvPr/>
         </p:nvSpPr>
@@ -4771,15 +4745,13 @@
           </a:bodyPr>
           <a:lstStyle/>
           <a:p>
-            <a:pPr>
-              <a:defRPr sz="2200" b="0">
+            <a:r>
+              <a:rPr sz="2200" b="0">
                 <a:solidFill>
                   <a:srgbClr val="15353B"/>
                 </a:solidFill>
                 <a:latin typeface="Segoe UI"/>
-              </a:defRPr>
-            </a:pPr>
-            <a:r>
+              </a:rPr>
               <a:t>Predefinir indicadores y asignación del piloto. Conservar la referencia y publicar resultados favorables y adversos.</a:t>
             </a:r>
           </a:p>
@@ -4787,7 +4759,7 @@
       </p:sp>
       <p:sp>
         <p:nvSpPr>
-          <p:cNvPr id="8" name="TextBox 7"/>
+          <p:cNvPr id="9" name="Texto editable"/>
           <p:cNvSpPr txBox="1"/>
           <p:nvPr/>
         </p:nvSpPr>
@@ -4807,15 +4779,13 @@
           </a:bodyPr>
           <a:lstStyle/>
           <a:p>
-            <a:pPr>
-              <a:defRPr sz="1900" b="0">
+            <a:r>
+              <a:rPr sz="1900" b="0">
                 <a:solidFill>
                   <a:srgbClr val="15353B"/>
                 </a:solidFill>
                 <a:latin typeface="Segoe UI"/>
-              </a:defRPr>
-            </a:pPr>
-            <a:r>
+              </a:rPr>
               <a:t>Equipo: Tecnocalidos. Firmas, registro y envío formal siguen pendientes.</a:t>
             </a:r>
           </a:p>
@@ -4823,7 +4793,7 @@
       </p:sp>
       <p:sp>
         <p:nvSpPr>
-          <p:cNvPr id="9" name="TextBox 8"/>
+          <p:cNvPr id="10" name="Texto editable"/>
           <p:cNvSpPr txBox="1"/>
           <p:nvPr/>
         </p:nvSpPr>
@@ -4843,15 +4813,13 @@
           </a:bodyPr>
           <a:lstStyle/>
           <a:p>
-            <a:pPr>
-              <a:defRPr sz="1000" b="0">
+            <a:r>
+              <a:rPr sz="1000" b="0">
                 <a:solidFill>
                   <a:srgbClr val="587177"/>
                 </a:solidFill>
                 <a:latin typeface="Segoe UI"/>
-              </a:defRPr>
-            </a:pPr>
-            <a:r>
+              </a:rPr>
               <a:t>2024 es presidencial y no valida directamente 2027. No se promete superioridad predictiva o efectividad preventiva.</a:t>
             </a:r>
           </a:p>
@@ -4866,7 +4834,7 @@
 </file>
 
 <file path=ppt/slides/slide2.xml><?xml version="1.0" encoding="utf-8"?>
-<p:sld xmlns:a="http://schemas.openxmlformats.org/drawingml/2006/main" xmlns:p="http://schemas.openxmlformats.org/presentationml/2006/main" xmlns:r="http://schemas.openxmlformats.org/officeDocument/2006/relationships">
+<p:sld xmlns:a="http://schemas.openxmlformats.org/drawingml/2006/main" xmlns:p="http://schemas.openxmlformats.org/presentationml/2006/main">
   <p:cSld>
     <p:bg>
       <p:bgPr>
@@ -4885,7 +4853,7 @@
       <p:grpSpPr/>
       <p:sp>
         <p:nvSpPr>
-          <p:cNvPr id="2" name="TextBox 1"/>
+          <p:cNvPr id="3" name="Texto editable"/>
           <p:cNvSpPr txBox="1"/>
           <p:nvPr/>
         </p:nvSpPr>
@@ -4905,15 +4873,13 @@
           </a:bodyPr>
           <a:lstStyle/>
           <a:p>
-            <a:pPr>
-              <a:defRPr sz="1200" b="1">
+            <a:r>
+              <a:rPr sz="1200" b="1">
                 <a:solidFill>
                   <a:srgbClr val="10685F"/>
                 </a:solidFill>
                 <a:latin typeface="Segoe UI"/>
-              </a:defRPr>
-            </a:pPr>
-            <a:r>
+              </a:rPr>
               <a:t>UMBRAL · 02</a:t>
             </a:r>
           </a:p>
@@ -4921,7 +4887,7 @@
       </p:sp>
       <p:sp>
         <p:nvSpPr>
-          <p:cNvPr id="3" name="TextBox 2"/>
+          <p:cNvPr id="4" name="Texto editable"/>
           <p:cNvSpPr txBox="1"/>
           <p:nvPr/>
         </p:nvSpPr>
@@ -4941,23 +4907,21 @@
           </a:bodyPr>
           <a:lstStyle/>
           <a:p>
-            <a:pPr>
-              <a:defRPr sz="3200" b="1">
+            <a:r>
+              <a:rPr sz="3200" b="1">
                 <a:solidFill>
                   <a:srgbClr val="15353B"/>
                 </a:solidFill>
                 <a:latin typeface="Segoe UI"/>
-              </a:defRPr>
-            </a:pPr>
-            <a:r>
-              <a:t>Una capacidad de 50 municipios</a:t>
-            </a:r>
-          </a:p>
-        </p:txBody>
-      </p:sp>
-      <p:sp>
-        <p:nvSpPr>
-          <p:cNvPr id="4" name="TextBox 3"/>
+              </a:rPr>
+              <a:t>Territorio y cobertura total</a:t>
+            </a:r>
+          </a:p>
+        </p:txBody>
+      </p:sp>
+      <p:sp>
+        <p:nvSpPr>
+          <p:cNvPr id="5" name="Texto editable"/>
           <p:cNvSpPr txBox="1"/>
           <p:nvPr/>
         </p:nvSpPr>
@@ -4977,29 +4941,27 @@
           </a:bodyPr>
           <a:lstStyle/>
           <a:p>
-            <a:pPr>
-              <a:defRPr sz="2400" b="1">
+            <a:r>
+              <a:rPr sz="2600" b="1">
                 <a:solidFill>
                   <a:srgbClr val="10685F"/>
                 </a:solidFill>
                 <a:latin typeface="Segoe UI"/>
-              </a:defRPr>
-            </a:pPr>
-            <a:r>
-              <a:t>La decisión inicial</a:t>
-            </a:r>
-          </a:p>
-        </p:txBody>
-      </p:sp>
-      <p:sp>
-        <p:nvSpPr>
-          <p:cNvPr id="5" name="TextBox 4"/>
+              </a:rPr>
+              <a:t>Municipio, estado o país</a:t>
+            </a:r>
+          </a:p>
+        </p:txBody>
+      </p:sp>
+      <p:sp>
+        <p:nvSpPr>
+          <p:cNvPr id="6" name="Texto editable"/>
           <p:cNvSpPr txBox="1"/>
           <p:nvPr/>
         </p:nvSpPr>
         <p:spPr>
           <a:xfrm>
-            <a:off x="594360" y="2538983"/>
+            <a:off x="594360" y="2569972"/>
             <a:ext cx="10881360" cy="914400"/>
           </a:xfrm>
           <a:prstGeom prst="rect">
@@ -5013,29 +4975,27 @@
           </a:bodyPr>
           <a:lstStyle/>
           <a:p>
-            <a:pPr>
-              <a:defRPr sz="2200" b="0">
+            <a:r>
+              <a:rPr sz="2100" b="0">
                 <a:solidFill>
                   <a:srgbClr val="15353B"/>
                 </a:solidFill>
                 <a:latin typeface="Segoe UI"/>
-              </a:defRPr>
-            </a:pPr>
-            <a:r>
-              <a:t>Un área de educación cívica puede revisar 50 municipios. Umbral ordena antecedentes, calidad y supuestos para preparar un plan de atención.</a:t>
-            </a:r>
-          </a:p>
-        </p:txBody>
-      </p:sp>
-      <p:sp>
-        <p:nvSpPr>
-          <p:cNvPr id="6" name="TextBox 5"/>
+              </a:rPr>
+              <a:t>La persona usuaria elige territorio, acción con evidencia y cobertura total. SMS cuenta personas distintas previstas para envío. Llamada cuenta contactos efectivos.</a:t>
+            </a:r>
+          </a:p>
+        </p:txBody>
+      </p:sp>
+      <p:sp>
+        <p:nvSpPr>
+          <p:cNvPr id="7" name="Texto editable"/>
           <p:cNvSpPr txBox="1"/>
           <p:nvPr/>
         </p:nvSpPr>
         <p:spPr>
           <a:xfrm>
-            <a:off x="594360" y="3421887"/>
+            <a:off x="594360" y="3421888"/>
             <a:ext cx="10881360" cy="914400"/>
           </a:xfrm>
           <a:prstGeom prst="rect">
@@ -5049,29 +5009,27 @@
           </a:bodyPr>
           <a:lstStyle/>
           <a:p>
-            <a:pPr>
-              <a:defRPr sz="2200" b="0">
+            <a:r>
+              <a:rPr sz="2100" b="0">
                 <a:solidFill>
                   <a:srgbClr val="15353B"/>
                 </a:solidFill>
                 <a:latin typeface="Segoe UI"/>
-              </a:defRPr>
-            </a:pPr>
-            <a:r>
-              <a:t>La persona usuaria elige entidad, capacidad y criterio de prioridad. Revisa cada municipio antes de exportar la lista.</a:t>
-            </a:r>
-          </a:p>
-        </p:txBody>
-      </p:sp>
-      <p:sp>
-        <p:nvSpPr>
-          <p:cNvPr id="7" name="TextBox 6"/>
+              </a:rPr>
+              <a:t>Prioridad concentra por ranking. Proporcional reparte por SV+NV 2024 entre todos los elegibles, con redondeo por mayor resto y tope de población.</a:t>
+            </a:r>
+          </a:p>
+        </p:txBody>
+      </p:sp>
+      <p:sp>
+        <p:nvSpPr>
+          <p:cNvPr id="8" name="Texto editable"/>
           <p:cNvSpPr txBox="1"/>
           <p:nvPr/>
         </p:nvSpPr>
         <p:spPr>
           <a:xfrm>
-            <a:off x="594360" y="4304792"/>
+            <a:off x="594360" y="4273804"/>
             <a:ext cx="10881360" cy="914400"/>
           </a:xfrm>
           <a:prstGeom prst="rect">
@@ -5085,23 +5043,21 @@
           </a:bodyPr>
           <a:lstStyle/>
           <a:p>
-            <a:pPr>
-              <a:defRPr sz="1800" b="0">
+            <a:r>
+              <a:rPr sz="1900" b="0">
                 <a:solidFill>
                   <a:srgbClr val="15353B"/>
                 </a:solidFill>
                 <a:latin typeface="Segoe UI"/>
-              </a:defRPr>
-            </a:pPr>
-            <a:r>
-              <a:t>50 es una capacidad propuesta y editable.</a:t>
-            </a:r>
-          </a:p>
-        </p:txBody>
-      </p:sp>
-      <p:sp>
-        <p:nvSpPr>
-          <p:cNvPr id="8" name="TextBox 7"/>
+              </a:rPr>
+              <a:t>Estas reglas son decisiones de planeación propias.</a:t>
+            </a:r>
+          </a:p>
+        </p:txBody>
+      </p:sp>
+      <p:sp>
+        <p:nvSpPr>
+          <p:cNvPr id="9" name="Texto editable"/>
           <p:cNvSpPr txBox="1"/>
           <p:nvPr/>
         </p:nvSpPr>
@@ -5121,16 +5077,14 @@
           </a:bodyPr>
           <a:lstStyle/>
           <a:p>
-            <a:pPr>
-              <a:defRPr sz="1000" b="0">
+            <a:r>
+              <a:rPr sz="1000" b="0">
                 <a:solidFill>
                   <a:srgbClr val="587177"/>
                 </a:solidFill>
                 <a:latin typeface="Segoe UI"/>
-              </a:defRPr>
-            </a:pPr>
-            <a:r>
-              <a:t>Fuente: convocatoria INE, pp. 3–5. https://ine.mx/wp-content/uploads/2026/09/Convocatoria_Hackaton-1.pdf</a:t>
+              </a:rPr>
+              <a:t>País: México, municipios con estimación incluidos. Los filtros y exclusiones delimitan el alcance.</a:t>
             </a:r>
           </a:p>
         </p:txBody>
@@ -5144,7 +5098,7 @@
 </file>
 
 <file path=ppt/slides/slide3.xml><?xml version="1.0" encoding="utf-8"?>
-<p:sld xmlns:a="http://schemas.openxmlformats.org/drawingml/2006/main" xmlns:p="http://schemas.openxmlformats.org/presentationml/2006/main" xmlns:r="http://schemas.openxmlformats.org/officeDocument/2006/relationships">
+<p:sld xmlns:a="http://schemas.openxmlformats.org/drawingml/2006/main" xmlns:p="http://schemas.openxmlformats.org/presentationml/2006/main">
   <p:cSld>
     <p:bg>
       <p:bgPr>
@@ -5163,7 +5117,7 @@
       <p:grpSpPr/>
       <p:sp>
         <p:nvSpPr>
-          <p:cNvPr id="2" name="TextBox 1"/>
+          <p:cNvPr id="3" name="Texto editable"/>
           <p:cNvSpPr txBox="1"/>
           <p:nvPr/>
         </p:nvSpPr>
@@ -5183,15 +5137,13 @@
           </a:bodyPr>
           <a:lstStyle/>
           <a:p>
-            <a:pPr>
-              <a:defRPr sz="1200" b="1">
+            <a:r>
+              <a:rPr sz="1200" b="1">
                 <a:solidFill>
                   <a:srgbClr val="10685F"/>
                 </a:solidFill>
                 <a:latin typeface="Segoe UI"/>
-              </a:defRPr>
-            </a:pPr>
-            <a:r>
+              </a:rPr>
               <a:t>UMBRAL · 03</a:t>
             </a:r>
           </a:p>
@@ -5199,7 +5151,7 @@
       </p:sp>
       <p:sp>
         <p:nvSpPr>
-          <p:cNvPr id="3" name="TextBox 2"/>
+          <p:cNvPr id="4" name="Texto editable"/>
           <p:cNvSpPr txBox="1"/>
           <p:nvPr/>
         </p:nvSpPr>
@@ -5219,15 +5171,13 @@
           </a:bodyPr>
           <a:lstStyle/>
           <a:p>
-            <a:pPr>
-              <a:defRPr sz="3200" b="1">
+            <a:r>
+              <a:rPr sz="3200" b="1">
                 <a:solidFill>
                   <a:srgbClr val="15353B"/>
                 </a:solidFill>
                 <a:latin typeface="Segoe UI"/>
-              </a:defRPr>
-            </a:pPr>
-            <a:r>
+              </a:rPr>
               <a:t>Cobertura y calidad visibles</a:t>
             </a:r>
           </a:p>
@@ -5235,7 +5185,7 @@
       </p:sp>
       <p:sp>
         <p:nvSpPr>
-          <p:cNvPr id="4" name="TextBox 3"/>
+          <p:cNvPr id="5" name="Texto editable"/>
           <p:cNvSpPr txBox="1"/>
           <p:nvPr/>
         </p:nvSpPr>
@@ -5255,15 +5205,13 @@
           </a:bodyPr>
           <a:lstStyle/>
           <a:p>
-            <a:pPr>
-              <a:defRPr sz="3600" b="1">
+            <a:r>
+              <a:rPr sz="3600" b="1">
                 <a:solidFill>
                   <a:srgbClr val="10685F"/>
                 </a:solidFill>
                 <a:latin typeface="Segoe UI"/>
-              </a:defRPr>
-            </a:pPr>
-            <a:r>
+              </a:rPr>
               <a:t>1,783 con estimación</a:t>
             </a:r>
           </a:p>
@@ -5271,7 +5219,7 @@
       </p:sp>
       <p:sp>
         <p:nvSpPr>
-          <p:cNvPr id="5" name="TextBox 4"/>
+          <p:cNvPr id="6" name="Texto editable"/>
           <p:cNvSpPr txBox="1"/>
           <p:nvPr/>
         </p:nvSpPr>
@@ -5291,15 +5239,13 @@
           </a:bodyPr>
           <a:lstStyle/>
           <a:p>
-            <a:pPr>
-              <a:defRPr sz="2400" b="1">
+            <a:r>
+              <a:rPr sz="2400" b="1">
                 <a:solidFill>
                   <a:srgbClr val="10685F"/>
                 </a:solidFill>
                 <a:latin typeface="Segoe UI"/>
-              </a:defRPr>
-            </a:pPr>
-            <a:r>
+              </a:rPr>
               <a:t>694 sin estimación · 2,477 claves históricas</a:t>
             </a:r>
           </a:p>
@@ -5307,7 +5253,7 @@
       </p:sp>
       <p:sp>
         <p:nvSpPr>
-          <p:cNvPr id="6" name="TextBox 5"/>
+          <p:cNvPr id="7" name="Texto editable"/>
           <p:cNvSpPr txBox="1"/>
           <p:nvPr/>
         </p:nvSpPr>
@@ -5327,15 +5273,13 @@
           </a:bodyPr>
           <a:lstStyle/>
           <a:p>
-            <a:pPr>
-              <a:defRPr sz="2400" b="1">
+            <a:r>
+              <a:rPr sz="2400" b="1">
                 <a:solidFill>
                   <a:srgbClr val="10685F"/>
                 </a:solidFill>
                 <a:latin typeface="Segoe UI"/>
-              </a:defRPr>
-            </a:pPr>
-            <a:r>
+              </a:rPr>
               <a:t>Abstención observada = 100 × NV / (SV + NV)</a:t>
             </a:r>
           </a:p>
@@ -5343,7 +5287,7 @@
       </p:sp>
       <p:sp>
         <p:nvSpPr>
-          <p:cNvPr id="7" name="TextBox 6"/>
+          <p:cNvPr id="8" name="Texto editable"/>
           <p:cNvSpPr txBox="1"/>
           <p:nvPr/>
         </p:nvSpPr>
@@ -5363,15 +5307,13 @@
           </a:bodyPr>
           <a:lstStyle/>
           <a:p>
-            <a:pPr>
-              <a:defRPr sz="2000" b="0">
+            <a:r>
+              <a:rPr sz="2000" b="0">
                 <a:solidFill>
                   <a:srgbClr val="15353B"/>
                 </a:solidFill>
                 <a:latin typeface="Segoe UI"/>
-              </a:defRPr>
-            </a:pPr>
-            <a:r>
+              </a:rPr>
               <a:t>NS identifica participación no especificada. La regla principal exige NS ≤10% en ambos antecedentes relevantes.</a:t>
             </a:r>
           </a:p>
@@ -5379,7 +5321,7 @@
       </p:sp>
       <p:sp>
         <p:nvSpPr>
-          <p:cNvPr id="8" name="TextBox 7"/>
+          <p:cNvPr id="9" name="Texto editable"/>
           <p:cNvSpPr txBox="1"/>
           <p:nvPr/>
         </p:nvSpPr>
@@ -5399,15 +5341,13 @@
           </a:bodyPr>
           <a:lstStyle/>
           <a:p>
-            <a:pPr>
-              <a:defRPr sz="2000" b="0">
+            <a:r>
+              <a:rPr sz="2000" b="0">
                 <a:solidFill>
                   <a:srgbClr val="15353B"/>
                 </a:solidFill>
                 <a:latin typeface="Segoe UI"/>
-              </a:defRPr>
-            </a:pPr>
-            <a:r>
+              </a:rPr>
               <a:t>El catálogo constante orienta la revisión territorial. Falta comprobar equivalencia de límites históricos.</a:t>
             </a:r>
           </a:p>
@@ -5415,7 +5355,7 @@
       </p:sp>
       <p:sp>
         <p:nvSpPr>
-          <p:cNvPr id="9" name="TextBox 8"/>
+          <p:cNvPr id="10" name="Texto editable"/>
           <p:cNvSpPr txBox="1"/>
           <p:nvPr/>
         </p:nvSpPr>
@@ -5435,15 +5375,13 @@
           </a:bodyPr>
           <a:lstStyle/>
           <a:p>
-            <a:pPr>
-              <a:defRPr sz="1000" b="0">
+            <a:r>
+              <a:rPr sz="1000" b="0">
                 <a:solidFill>
                   <a:srgbClr val="587177"/>
                 </a:solidFill>
                 <a:latin typeface="Segoe UI"/>
-              </a:defRPr>
-            </a:pPr>
-            <a:r>
+              </a:rPr>
               <a:t>Fuente: auditoría y base municipal del proyecto. CCPC: https://ine.mx/transparencia/datos-abiertos/visualizacion-datos/conteos-censales-participacion/</a:t>
             </a:r>
           </a:p>
@@ -5458,7 +5396,7 @@
 </file>
 
 <file path=ppt/slides/slide4.xml><?xml version="1.0" encoding="utf-8"?>
-<p:sld xmlns:a="http://schemas.openxmlformats.org/drawingml/2006/main" xmlns:p="http://schemas.openxmlformats.org/presentationml/2006/main" xmlns:r="http://schemas.openxmlformats.org/officeDocument/2006/relationships">
+<p:sld xmlns:a="http://schemas.openxmlformats.org/drawingml/2006/main" xmlns:p="http://schemas.openxmlformats.org/presentationml/2006/main">
   <p:cSld>
     <p:bg>
       <p:bgPr>
@@ -5477,7 +5415,7 @@
       <p:grpSpPr/>
       <p:sp>
         <p:nvSpPr>
-          <p:cNvPr id="2" name="TextBox 1"/>
+          <p:cNvPr id="3" name="Texto editable"/>
           <p:cNvSpPr txBox="1"/>
           <p:nvPr/>
         </p:nvSpPr>
@@ -5497,15 +5435,13 @@
           </a:bodyPr>
           <a:lstStyle/>
           <a:p>
-            <a:pPr>
-              <a:defRPr sz="1200" b="1">
+            <a:r>
+              <a:rPr sz="1200" b="1">
                 <a:solidFill>
                   <a:srgbClr val="10685F"/>
                 </a:solidFill>
                 <a:latin typeface="Segoe UI"/>
-              </a:defRPr>
-            </a:pPr>
-            <a:r>
+              </a:rPr>
               <a:t>UMBRAL · 04</a:t>
             </a:r>
           </a:p>
@@ -5513,7 +5449,7 @@
       </p:sp>
       <p:sp>
         <p:nvSpPr>
-          <p:cNvPr id="3" name="TextBox 2"/>
+          <p:cNvPr id="4" name="Texto editable"/>
           <p:cNvSpPr txBox="1"/>
           <p:nvPr/>
         </p:nvSpPr>
@@ -5533,15 +5469,13 @@
           </a:bodyPr>
           <a:lstStyle/>
           <a:p>
-            <a:pPr>
-              <a:defRPr sz="3200" b="1">
+            <a:r>
+              <a:rPr sz="3200" b="1">
                 <a:solidFill>
                   <a:srgbClr val="15353B"/>
                 </a:solidFill>
                 <a:latin typeface="Segoe UI"/>
-              </a:defRPr>
-            </a:pPr>
-            <a:r>
+              </a:rPr>
               <a:t>La referencia también compite</a:t>
             </a:r>
           </a:p>
@@ -5549,7 +5483,7 @@
       </p:sp>
       <p:sp>
         <p:nvSpPr>
-          <p:cNvPr id="4" name="TextBox 3"/>
+          <p:cNvPr id="5" name="Texto editable"/>
           <p:cNvSpPr txBox="1"/>
           <p:nvPr/>
         </p:nvSpPr>
@@ -5569,15 +5503,13 @@
           </a:bodyPr>
           <a:lstStyle/>
           <a:p>
-            <a:pPr>
-              <a:defRPr sz="2400" b="1">
+            <a:r>
+              <a:rPr sz="2400" b="1">
                 <a:solidFill>
                   <a:srgbClr val="10685F"/>
                 </a:solidFill>
                 <a:latin typeface="Segoe UI"/>
-              </a:defRPr>
-            </a:pPr>
-            <a:r>
+              </a:rPr>
               <a:t>Referencia: última elección del mismo tipo</a:t>
             </a:r>
           </a:p>
@@ -5585,13 +5517,13 @@
       </p:sp>
       <p:sp>
         <p:nvSpPr>
-          <p:cNvPr id="5" name="TextBox 4"/>
+          <p:cNvPr id="6" name="Texto editable"/>
           <p:cNvSpPr txBox="1"/>
           <p:nvPr/>
         </p:nvSpPr>
         <p:spPr>
           <a:xfrm>
-            <a:off x="594360" y="2538983"/>
+            <a:off x="594360" y="2538984"/>
             <a:ext cx="10881360" cy="914400"/>
           </a:xfrm>
           <a:prstGeom prst="rect">
@@ -5605,15 +5537,13 @@
           </a:bodyPr>
           <a:lstStyle/>
           <a:p>
-            <a:pPr>
-              <a:defRPr sz="2200" b="0">
+            <a:r>
+              <a:rPr sz="2200" b="0">
                 <a:solidFill>
                   <a:srgbClr val="15353B"/>
                 </a:solidFill>
                 <a:latin typeface="Segoe UI"/>
-              </a:defRPr>
-            </a:pPr>
-            <a:r>
+              </a:rPr>
               <a:t>Para 2027 usa 2021. Ridge estima un ajuste con historia electoral, edad agregada, urbanización y calidad.</a:t>
             </a:r>
           </a:p>
@@ -5621,13 +5551,13 @@
       </p:sp>
       <p:sp>
         <p:nvSpPr>
-          <p:cNvPr id="6" name="TextBox 5"/>
+          <p:cNvPr id="7" name="Texto editable"/>
           <p:cNvSpPr txBox="1"/>
           <p:nvPr/>
         </p:nvSpPr>
         <p:spPr>
           <a:xfrm>
-            <a:off x="594360" y="3421887"/>
+            <a:off x="594360" y="3421888"/>
             <a:ext cx="10881360" cy="914400"/>
           </a:xfrm>
           <a:prstGeom prst="rect">
@@ -5641,15 +5571,13 @@
           </a:bodyPr>
           <a:lstStyle/>
           <a:p>
-            <a:pPr>
-              <a:defRPr sz="2200" b="0">
+            <a:r>
+              <a:rPr sz="2200" b="0">
                 <a:solidFill>
                   <a:srgbClr val="15353B"/>
                 </a:solidFill>
                 <a:latin typeface="Segoe UI"/>
-              </a:defRPr>
-            </a:pPr>
-            <a:r>
+              </a:rPr>
               <a:t>Alpha = 10 permanece congelado. Cada corte aprende con resultados anteriores al año objetivo.</a:t>
             </a:r>
           </a:p>
@@ -5657,7 +5585,7 @@
       </p:sp>
       <p:sp>
         <p:nvSpPr>
-          <p:cNvPr id="7" name="TextBox 6"/>
+          <p:cNvPr id="8" name="Texto editable"/>
           <p:cNvSpPr txBox="1"/>
           <p:nvPr/>
         </p:nvSpPr>
@@ -5677,15 +5605,13 @@
           </a:bodyPr>
           <a:lstStyle/>
           <a:p>
-            <a:pPr>
-              <a:defRPr sz="2000" b="0">
+            <a:r>
+              <a:rPr sz="2000" b="0">
                 <a:solidFill>
                   <a:srgbClr val="15353B"/>
                 </a:solidFill>
                 <a:latin typeface="Segoe UI"/>
-              </a:defRPr>
-            </a:pPr>
-            <a:r>
+              </a:rPr>
               <a:t>2021 seleccionó el método. Ese corte no es una prueba independiente posterior a la selección.</a:t>
             </a:r>
           </a:p>
@@ -5693,7 +5619,7 @@
       </p:sp>
       <p:sp>
         <p:nvSpPr>
-          <p:cNvPr id="8" name="TextBox 7"/>
+          <p:cNvPr id="9" name="Texto editable"/>
           <p:cNvSpPr txBox="1"/>
           <p:nvPr/>
         </p:nvSpPr>
@@ -5713,15 +5639,13 @@
           </a:bodyPr>
           <a:lstStyle/>
           <a:p>
-            <a:pPr>
-              <a:defRPr sz="1000" b="0">
+            <a:r>
+              <a:rPr sz="1000" b="0">
                 <a:solidFill>
                   <a:srgbClr val="587177"/>
                 </a:solidFill>
                 <a:latin typeface="Segoe UI"/>
-              </a:defRPr>
-            </a:pPr>
-            <a:r>
+              </a:rPr>
               <a:t>Fuente: modelado/METODOLOGIA.md y modelado/salidas/metricas.json. No hay ajuste para mejorar 2024.</a:t>
             </a:r>
           </a:p>
@@ -5736,7 +5660,7 @@
 </file>
 
 <file path=ppt/slides/slide5.xml><?xml version="1.0" encoding="utf-8"?>
-<p:sld xmlns:a="http://schemas.openxmlformats.org/drawingml/2006/main" xmlns:p="http://schemas.openxmlformats.org/presentationml/2006/main" xmlns:r="http://schemas.openxmlformats.org/officeDocument/2006/relationships">
+<p:sld xmlns:a="http://schemas.openxmlformats.org/drawingml/2006/main" xmlns:p="http://schemas.openxmlformats.org/presentationml/2006/main">
   <p:cSld>
     <p:bg>
       <p:bgPr>
@@ -5755,7 +5679,7 @@
       <p:grpSpPr/>
       <p:sp>
         <p:nvSpPr>
-          <p:cNvPr id="2" name="TextBox 1"/>
+          <p:cNvPr id="3" name="Texto editable"/>
           <p:cNvSpPr txBox="1"/>
           <p:nvPr/>
         </p:nvSpPr>
@@ -5775,15 +5699,13 @@
           </a:bodyPr>
           <a:lstStyle/>
           <a:p>
-            <a:pPr>
-              <a:defRPr sz="1200" b="1">
+            <a:r>
+              <a:rPr sz="1200" b="1">
                 <a:solidFill>
                   <a:srgbClr val="10685F"/>
                 </a:solidFill>
                 <a:latin typeface="Segoe UI"/>
-              </a:defRPr>
-            </a:pPr>
-            <a:r>
+              </a:rPr>
               <a:t>UMBRAL · 05</a:t>
             </a:r>
           </a:p>
@@ -5791,7 +5713,7 @@
       </p:sp>
       <p:sp>
         <p:nvSpPr>
-          <p:cNvPr id="3" name="TextBox 2"/>
+          <p:cNvPr id="4" name="Texto editable"/>
           <p:cNvSpPr txBox="1"/>
           <p:nvPr/>
         </p:nvSpPr>
@@ -5811,15 +5733,13 @@
           </a:bodyPr>
           <a:lstStyle/>
           <a:p>
-            <a:pPr>
-              <a:defRPr sz="3200" b="1">
+            <a:r>
+              <a:rPr sz="3200" b="1">
                 <a:solidFill>
                   <a:srgbClr val="15353B"/>
                 </a:solidFill>
                 <a:latin typeface="Segoe UI"/>
-              </a:defRPr>
-            </a:pPr>
-            <a:r>
+              </a:rPr>
               <a:t>Ridge mejora en 2021 y empeora en 2024</a:t>
             </a:r>
           </a:p>
@@ -5827,7 +5747,7 @@
       </p:sp>
       <p:graphicFrame>
         <p:nvGraphicFramePr>
-          <p:cNvPr id="4" name="Table 3"/>
+          <p:cNvPr id="5" name="Table 3"/>
           <p:cNvGraphicFramePr>
             <a:graphicFrameLocks noGrp="1"/>
           </p:cNvGraphicFramePr>
@@ -6466,7 +6386,7 @@
       </p:graphicFrame>
       <p:sp>
         <p:nvSpPr>
-          <p:cNvPr id="5" name="TextBox 4"/>
+          <p:cNvPr id="6" name="Texto editable"/>
           <p:cNvSpPr txBox="1"/>
           <p:nvPr/>
         </p:nvSpPr>
@@ -6486,15 +6406,13 @@
           </a:bodyPr>
           <a:lstStyle/>
           <a:p>
-            <a:pPr>
-              <a:defRPr sz="2500" b="1">
+            <a:r>
+              <a:rPr sz="2500" b="1">
                 <a:solidFill>
                   <a:srgbClr val="10685F"/>
                 </a:solidFill>
                 <a:latin typeface="Segoe UI"/>
-              </a:defRPr>
-            </a:pPr>
-            <a:r>
+              </a:rPr>
               <a:t>La evidencia no demuestra superioridad consistente.</a:t>
             </a:r>
           </a:p>
@@ -6502,14 +6420,14 @@
       </p:sp>
       <p:sp>
         <p:nvSpPr>
-          <p:cNvPr id="6" name="TextBox 5"/>
+          <p:cNvPr id="7" name="Texto editable"/>
           <p:cNvSpPr txBox="1"/>
           <p:nvPr/>
         </p:nvSpPr>
         <p:spPr>
           <a:xfrm>
             <a:off x="594360" y="5120640"/>
-            <a:ext cx="10972800" cy="692911"/>
+            <a:ext cx="10972800" cy="692912"/>
           </a:xfrm>
           <a:prstGeom prst="rect">
             <a:avLst/>
@@ -6522,15 +6440,13 @@
           </a:bodyPr>
           <a:lstStyle/>
           <a:p>
-            <a:pPr>
-              <a:defRPr sz="2000" b="0">
+            <a:r>
+              <a:rPr sz="2000" b="0">
                 <a:solidFill>
                   <a:srgbClr val="15353B"/>
                 </a:solidFill>
                 <a:latin typeface="Segoe UI"/>
-              </a:defRPr>
-            </a:pPr>
-            <a:r>
+              </a:rPr>
               <a:t>Spearman referencia / Ridge: 0.485 / 0.599 en 2021 y 0.827 / 0.811 en 2024. Análisis posterior, sin reajuste del modelo.</a:t>
             </a:r>
           </a:p>
@@ -6538,7 +6454,7 @@
       </p:sp>
       <p:sp>
         <p:nvSpPr>
-          <p:cNvPr id="7" name="TextBox 6"/>
+          <p:cNvPr id="8" name="Texto editable"/>
           <p:cNvSpPr txBox="1"/>
           <p:nvPr/>
         </p:nvSpPr>
@@ -6558,15 +6474,13 @@
           </a:bodyPr>
           <a:lstStyle/>
           <a:p>
-            <a:pPr>
-              <a:defRPr sz="1000" b="0">
+            <a:r>
+              <a:rPr sz="1000" b="0">
                 <a:solidFill>
                   <a:srgbClr val="587177"/>
                 </a:solidFill>
                 <a:latin typeface="Segoe UI"/>
-              </a:defRPr>
-            </a:pPr>
-            <a:r>
+              </a:rPr>
               <a:t>MAE en puntos porcentuales. Ponderación por SV+NV observado del objetivo. Top50 dentro de cada cohorte evaluable.</a:t>
             </a:r>
           </a:p>
@@ -6581,7 +6495,7 @@
 </file>
 
 <file path=ppt/slides/slide6.xml><?xml version="1.0" encoding="utf-8"?>
-<p:sld xmlns:a="http://schemas.openxmlformats.org/drawingml/2006/main" xmlns:p="http://schemas.openxmlformats.org/presentationml/2006/main" xmlns:r="http://schemas.openxmlformats.org/officeDocument/2006/relationships">
+<p:sld xmlns:a="http://schemas.openxmlformats.org/drawingml/2006/main" xmlns:p="http://schemas.openxmlformats.org/presentationml/2006/main">
   <p:cSld>
     <p:bg>
       <p:bgPr>
@@ -6600,7 +6514,7 @@
       <p:grpSpPr/>
       <p:sp>
         <p:nvSpPr>
-          <p:cNvPr id="2" name="TextBox 1"/>
+          <p:cNvPr id="3" name="Texto editable"/>
           <p:cNvSpPr txBox="1"/>
           <p:nvPr/>
         </p:nvSpPr>
@@ -6620,15 +6534,13 @@
           </a:bodyPr>
           <a:lstStyle/>
           <a:p>
-            <a:pPr>
-              <a:defRPr sz="1200" b="1">
+            <a:r>
+              <a:rPr sz="1200" b="1">
                 <a:solidFill>
                   <a:srgbClr val="10685F"/>
                 </a:solidFill>
                 <a:latin typeface="Segoe UI"/>
-              </a:defRPr>
-            </a:pPr>
-            <a:r>
+              </a:rPr>
               <a:t>UMBRAL · 06</a:t>
             </a:r>
           </a:p>
@@ -6636,7 +6548,7 @@
       </p:sp>
       <p:sp>
         <p:nvSpPr>
-          <p:cNvPr id="3" name="TextBox 2"/>
+          <p:cNvPr id="4" name="Texto editable"/>
           <p:cNvSpPr txBox="1"/>
           <p:nvPr/>
         </p:nvSpPr>
@@ -6656,30 +6568,28 @@
           </a:bodyPr>
           <a:lstStyle/>
           <a:p>
-            <a:pPr>
-              <a:defRPr sz="3200" b="1">
+            <a:r>
+              <a:rPr sz="3200" b="1">
                 <a:solidFill>
                   <a:srgbClr val="15353B"/>
                 </a:solidFill>
                 <a:latin typeface="Segoe UI"/>
-              </a:defRPr>
-            </a:pPr>
-            <a:r>
-              <a:t>Mapa y escenario sobre los mismos territorios</a:t>
-            </a:r>
-          </a:p>
-        </p:txBody>
-      </p:sp>
-      <p:sp>
-        <p:nvSpPr>
-          <p:cNvPr id="4" name="TextBox 3"/>
+              </a:rPr>
+              <a:t>Evidencia externa y escenario territorial</a:t>
+            </a:r>
+          </a:p>
+        </p:txBody>
+      </p:sp>
+      <p:sp>
+        <p:nvSpPr>
+          <p:cNvPr id="5" name="Texto editable"/>
           <p:cNvSpPr txBox="1"/>
           <p:nvPr/>
         </p:nvSpPr>
         <p:spPr>
           <a:xfrm>
-            <a:off x="594360" y="1828800"/>
-            <a:ext cx="5394960" cy="414020"/>
+            <a:off x="594360" y="1965960"/>
+            <a:ext cx="10881360" cy="914400"/>
           </a:xfrm>
           <a:prstGeom prst="rect">
             <a:avLst/>
@@ -6692,30 +6602,28 @@
           </a:bodyPr>
           <a:lstStyle/>
           <a:p>
-            <a:pPr>
-              <a:defRPr sz="2200" b="1">
+            <a:r>
+              <a:rPr sz="2500" b="1">
                 <a:solidFill>
                   <a:srgbClr val="10685F"/>
                 </a:solidFill>
                 <a:latin typeface="Segoe UI"/>
-              </a:defRPr>
-            </a:pPr>
-            <a:r>
-              <a:t>Con intervención hipotética</a:t>
-            </a:r>
-          </a:p>
-        </p:txBody>
-      </p:sp>
-      <p:sp>
-        <p:nvSpPr>
-          <p:cNvPr id="5" name="TextBox 4"/>
+              </a:rPr>
+              <a:t>Acción y coeficiente publicado</a:t>
+            </a:r>
+          </a:p>
+        </p:txBody>
+      </p:sp>
+      <p:sp>
+        <p:nvSpPr>
+          <p:cNvPr id="6" name="Texto editable"/>
           <p:cNvSpPr txBox="1"/>
           <p:nvPr/>
         </p:nvSpPr>
         <p:spPr>
           <a:xfrm>
-            <a:off x="6263640" y="1828800"/>
-            <a:ext cx="5303520" cy="414020"/>
+            <a:off x="594360" y="2554478"/>
+            <a:ext cx="10881360" cy="914400"/>
           </a:xfrm>
           <a:prstGeom prst="rect">
             <a:avLst/>
@@ -6728,78 +6636,28 @@
           </a:bodyPr>
           <a:lstStyle/>
           <a:p>
-            <a:pPr>
-              <a:defRPr sz="2200" b="1">
-                <a:solidFill>
-                  <a:srgbClr val="10685F"/>
+            <a:r>
+              <a:rPr sz="2000" b="0">
+                <a:solidFill>
+                  <a:srgbClr val="15353B"/>
                 </a:solidFill>
                 <a:latin typeface="Segoe UI"/>
-              </a:defRPr>
-            </a:pPr>
-            <a:r>
-              <a:t>Diferencia respecto a la base</a:t>
-            </a:r>
-          </a:p>
-        </p:txBody>
-      </p:sp>
-      <p:pic>
-        <p:nvPicPr>
-          <p:cNvPr id="6" name="Picture 5" descr="mapa_intervencion.png"/>
-          <p:cNvPicPr>
-            <a:picLocks noChangeAspect="1"/>
-          </p:cNvPicPr>
-          <p:nvPr/>
-        </p:nvPicPr>
-        <p:blipFill>
-          <a:blip r:embed="rId2"/>
-          <a:stretch>
-            <a:fillRect/>
-          </a:stretch>
-        </p:blipFill>
-        <p:spPr>
-          <a:xfrm>
-            <a:off x="594360" y="2331720"/>
-            <a:ext cx="5349240" cy="3248125"/>
-          </a:xfrm>
-          <a:prstGeom prst="rect">
-            <a:avLst/>
-          </a:prstGeom>
-        </p:spPr>
-      </p:pic>
-      <p:pic>
-        <p:nvPicPr>
-          <p:cNvPr id="7" name="Picture 6" descr="mapa_cambio.png"/>
-          <p:cNvPicPr>
-            <a:picLocks noChangeAspect="1"/>
-          </p:cNvPicPr>
-          <p:nvPr/>
-        </p:nvPicPr>
-        <p:blipFill>
-          <a:blip r:embed="rId3"/>
-          <a:stretch>
-            <a:fillRect/>
-          </a:stretch>
-        </p:blipFill>
-        <p:spPr>
-          <a:xfrm>
-            <a:off x="6263640" y="2331720"/>
-            <a:ext cx="5349240" cy="3248125"/>
-          </a:xfrm>
-          <a:prstGeom prst="rect">
-            <a:avLst/>
-          </a:prstGeom>
-        </p:spPr>
-      </p:pic>
-      <p:sp>
-        <p:nvSpPr>
-          <p:cNvPr id="8" name="TextBox 7"/>
+              </a:rPr>
+              <a:t>SMS Suecia: +0.30 pp ITT, intervalo 0.13–0.48. SMS EEUU: +0.25 pp ITT, intervalo 0.17–0.34. Llamada: +4.1 pp ATT, error estándar 1.7.</a:t>
+            </a:r>
+          </a:p>
+        </p:txBody>
+      </p:sp>
+      <p:sp>
+        <p:nvSpPr>
+          <p:cNvPr id="7" name="Texto editable"/>
           <p:cNvSpPr txBox="1"/>
           <p:nvPr/>
         </p:nvSpPr>
         <p:spPr>
           <a:xfrm>
-            <a:off x="594360" y="5715000"/>
-            <a:ext cx="10972800" cy="457200"/>
+            <a:off x="594360" y="3375406"/>
+            <a:ext cx="10881360" cy="1049274"/>
           </a:xfrm>
           <a:prstGeom prst="rect">
             <a:avLst/>
@@ -6812,30 +6670,28 @@
           </a:bodyPr>
           <a:lstStyle/>
           <a:p>
-            <a:pPr>
-              <a:defRPr sz="1600" b="0">
+            <a:r>
+              <a:rPr sz="2100" b="0">
                 <a:solidFill>
                   <a:srgbClr val="15353B"/>
                 </a:solidFill>
                 <a:latin typeface="Segoe UI"/>
-              </a:defRPr>
-            </a:pPr>
-            <a:r>
-              <a:t>Mismos territorios y umbrales base fijos. Cobertura y ponderación: SV+NV observado 2024. NS se informa por separado.</a:t>
-            </a:r>
-          </a:p>
-        </p:txBody>
-      </p:sp>
-      <p:sp>
-        <p:nvSpPr>
-          <p:cNvPr id="9" name="TextBox 8"/>
+              </a:rPr>
+              <a:t>Votos adicionales hipotéticos = cobertura × coeficiente / 100, limitados por abstención esperada entre cubiertos. El coeficiente ya mide cambio en participación, sin otra tasa de respuesta.</a:t>
+            </a:r>
+          </a:p>
+        </p:txBody>
+      </p:sp>
+      <p:sp>
+        <p:nvSpPr>
+          <p:cNvPr id="8" name="Texto editable"/>
           <p:cNvSpPr txBox="1"/>
           <p:nvPr/>
         </p:nvSpPr>
         <p:spPr>
           <a:xfrm>
-            <a:off x="594360" y="6245352"/>
-            <a:ext cx="10881360" cy="411480"/>
+            <a:off x="594360" y="4552696"/>
+            <a:ext cx="10881360" cy="914400"/>
           </a:xfrm>
           <a:prstGeom prst="rect">
             <a:avLst/>
@@ -6848,16 +6704,48 @@
           </a:bodyPr>
           <a:lstStyle/>
           <a:p>
-            <a:pPr>
-              <a:defRPr sz="1000" b="0">
+            <a:r>
+              <a:rPr sz="2000" b="0">
+                <a:solidFill>
+                  <a:srgbClr val="15353B"/>
+                </a:solidFill>
+                <a:latin typeface="Segoe UI"/>
+              </a:rPr>
+              <a:t>La comparación conserva todo el territorio estimable, incluso municipios sin atención. Umbrales base fijos y ponderación SV+NV 2024.</a:t>
+            </a:r>
+          </a:p>
+        </p:txBody>
+      </p:sp>
+      <p:sp>
+        <p:nvSpPr>
+          <p:cNvPr id="9" name="Texto editable"/>
+          <p:cNvSpPr txBox="1"/>
+          <p:nvPr/>
+        </p:nvSpPr>
+        <p:spPr>
+          <a:xfrm>
+            <a:off x="594360" y="6245352"/>
+            <a:ext cx="10881360" cy="411480"/>
+          </a:xfrm>
+          <a:prstGeom prst="rect">
+            <a:avLst/>
+          </a:prstGeom>
+          <a:noFill/>
+        </p:spPr>
+        <p:txBody>
+          <a:bodyPr wrap="square" lIns="0" rIns="0" tIns="0" bIns="0">
+            <a:spAutoFit/>
+          </a:bodyPr>
+          <a:lstStyle/>
+          <a:p>
+            <a:r>
+              <a:rPr sz="1000" b="0">
                 <a:solidFill>
                   <a:srgbClr val="587177"/>
                 </a:solidFill>
                 <a:latin typeface="Segoe UI"/>
-              </a:defRPr>
-            </a:pPr>
-            <a:r>
-              <a:t>Capturas de la demo corregida. El escenario es hipotético, sin efecto causal demostrado ni población 2027 proyectada.</a:t>
+              </a:rPr>
+              <a:t>DOI: 10.1017/S0007123424000504; 10.1007/s11109-026-10121-2; 10.1177/0956797609359326. Traslado a México: supuesto.</a:t>
             </a:r>
           </a:p>
         </p:txBody>
@@ -6871,7 +6759,7 @@
 </file>
 
 <file path=ppt/slides/slide7.xml><?xml version="1.0" encoding="utf-8"?>
-<p:sld xmlns:a="http://schemas.openxmlformats.org/drawingml/2006/main" xmlns:p="http://schemas.openxmlformats.org/presentationml/2006/main" xmlns:r="http://schemas.openxmlformats.org/officeDocument/2006/relationships">
+<p:sld xmlns:a="http://schemas.openxmlformats.org/drawingml/2006/main" xmlns:p="http://schemas.openxmlformats.org/presentationml/2006/main">
   <p:cSld>
     <p:bg>
       <p:bgPr>
@@ -6890,7 +6778,7 @@
       <p:grpSpPr/>
       <p:sp>
         <p:nvSpPr>
-          <p:cNvPr id="2" name="TextBox 1"/>
+          <p:cNvPr id="3" name="Texto editable"/>
           <p:cNvSpPr txBox="1"/>
           <p:nvPr/>
         </p:nvSpPr>
@@ -6910,15 +6798,13 @@
           </a:bodyPr>
           <a:lstStyle/>
           <a:p>
-            <a:pPr>
-              <a:defRPr sz="1200" b="1">
+            <a:r>
+              <a:rPr sz="1200" b="1">
                 <a:solidFill>
                   <a:srgbClr val="10685F"/>
                 </a:solidFill>
                 <a:latin typeface="Segoe UI"/>
-              </a:defRPr>
-            </a:pPr>
-            <a:r>
+              </a:rPr>
               <a:t>UMBRAL · 07</a:t>
             </a:r>
           </a:p>
@@ -6926,7 +6812,7 @@
       </p:sp>
       <p:sp>
         <p:nvSpPr>
-          <p:cNvPr id="3" name="TextBox 2"/>
+          <p:cNvPr id="4" name="Texto editable"/>
           <p:cNvSpPr txBox="1"/>
           <p:nvPr/>
         </p:nvSpPr>
@@ -6946,15 +6832,13 @@
           </a:bodyPr>
           <a:lstStyle/>
           <a:p>
-            <a:pPr>
-              <a:defRPr sz="3200" b="1">
+            <a:r>
+              <a:rPr sz="3200" b="1">
                 <a:solidFill>
                   <a:srgbClr val="15353B"/>
                 </a:solidFill>
                 <a:latin typeface="Segoe UI"/>
-              </a:defRPr>
-            </a:pPr>
-            <a:r>
+              </a:rPr>
               <a:t>Una ficha para revisar cada prioridad</a:t>
             </a:r>
           </a:p>
@@ -6962,7 +6846,7 @@
       </p:sp>
       <p:sp>
         <p:nvSpPr>
-          <p:cNvPr id="4" name="TextBox 3"/>
+          <p:cNvPr id="5" name="Texto editable"/>
           <p:cNvSpPr txBox="1"/>
           <p:nvPr/>
         </p:nvSpPr>
@@ -6982,15 +6866,13 @@
           </a:bodyPr>
           <a:lstStyle/>
           <a:p>
-            <a:pPr>
-              <a:defRPr sz="2600" b="1">
+            <a:r>
+              <a:rPr sz="2600" b="1">
                 <a:solidFill>
                   <a:srgbClr val="10685F"/>
                 </a:solidFill>
                 <a:latin typeface="Segoe UI"/>
-              </a:defRPr>
-            </a:pPr>
-            <a:r>
+              </a:rPr>
               <a:t>¿Por qué este municipio?</a:t>
             </a:r>
           </a:p>
@@ -6998,13 +6880,13 @@
       </p:sp>
       <p:sp>
         <p:nvSpPr>
-          <p:cNvPr id="5" name="TextBox 4"/>
+          <p:cNvPr id="6" name="Texto editable"/>
           <p:cNvSpPr txBox="1"/>
           <p:nvPr/>
         </p:nvSpPr>
         <p:spPr>
           <a:xfrm>
-            <a:off x="594360" y="2569971"/>
+            <a:off x="594360" y="2569972"/>
             <a:ext cx="10881360" cy="914400"/>
           </a:xfrm>
           <a:prstGeom prst="rect">
@@ -7018,15 +6900,13 @@
           </a:bodyPr>
           <a:lstStyle/>
           <a:p>
-            <a:pPr>
-              <a:defRPr sz="2100" b="0">
+            <a:r>
+              <a:rPr sz="2100" b="0">
                 <a:solidFill>
                   <a:srgbClr val="15353B"/>
                 </a:solidFill>
                 <a:latin typeface="Segoe UI"/>
-              </a:defRPr>
-            </a:pPr>
-            <a:r>
+              </a:rPr>
               <a:t>Puesto, antecedentes, calidad NS y acuerdo entre referencia y Ridge. Perfil CCPC por grupos como capa descriptiva separada.</a:t>
             </a:r>
           </a:p>
@@ -7034,13 +6914,13 @@
       </p:sp>
       <p:sp>
         <p:nvSpPr>
-          <p:cNvPr id="6" name="TextBox 5"/>
+          <p:cNvPr id="7" name="Texto editable"/>
           <p:cNvSpPr txBox="1"/>
           <p:nvPr/>
         </p:nvSpPr>
         <p:spPr>
           <a:xfrm>
-            <a:off x="594360" y="3421887"/>
+            <a:off x="594360" y="3421888"/>
             <a:ext cx="10881360" cy="914400"/>
           </a:xfrm>
           <a:prstGeom prst="rect">
@@ -7054,29 +6934,27 @@
           </a:bodyPr>
           <a:lstStyle/>
           <a:p>
-            <a:pPr>
-              <a:defRPr sz="2200" b="0">
+            <a:r>
+              <a:rPr sz="2200" b="0">
                 <a:solidFill>
                   <a:srgbClr val="15353B"/>
                 </a:solidFill>
                 <a:latin typeface="Segoe UI"/>
-              </a:defRPr>
-            </a:pPr>
-            <a:r>
-              <a:t>Estabilidad de selección: dos métodos × NS 5/10/20.</a:t>
-            </a:r>
-          </a:p>
-        </p:txBody>
-      </p:sp>
-      <p:sp>
-        <p:nvSpPr>
-          <p:cNvPr id="7" name="TextBox 6"/>
+              </a:rPr>
+              <a:t>Frecuencia entre seis variantes: dos métodos × NS 5/10/20. N equivale a municipios atendidos del plan actual.</a:t>
+            </a:r>
+          </a:p>
+        </p:txBody>
+      </p:sp>
+      <p:sp>
+        <p:nvSpPr>
+          <p:cNvPr id="8" name="Texto editable"/>
           <p:cNvSpPr txBox="1"/>
           <p:nvPr/>
         </p:nvSpPr>
         <p:spPr>
           <a:xfrm>
-            <a:off x="594360" y="3963924"/>
+            <a:off x="594360" y="4304792"/>
             <a:ext cx="10881360" cy="914400"/>
           </a:xfrm>
           <a:prstGeom prst="rect">
@@ -7090,23 +6968,21 @@
           </a:bodyPr>
           <a:lstStyle/>
           <a:p>
-            <a:pPr>
-              <a:defRPr sz="2100" b="0">
+            <a:r>
+              <a:rPr sz="2100" b="0">
                 <a:solidFill>
                   <a:srgbClr val="15353B"/>
                 </a:solidFill>
                 <a:latin typeface="Segoe UI"/>
-              </a:defRPr>
-            </a:pPr>
-            <a:r>
-              <a:t>6/6: núcleo robusto; 1/6–5/6: zona de revisión. Elegibilidad aparte. Las variantes comparten datos y pueden equivocarse juntas.</a:t>
-            </a:r>
-          </a:p>
-        </p:txBody>
-      </p:sp>
-      <p:sp>
-        <p:nvSpPr>
-          <p:cNvPr id="8" name="TextBox 7"/>
+              </a:rPr>
+              <a:t>Compara rankings con N equivalente. No recalcula presupuesto ni reparto y no es probabilidad. El caso 23008 documenta por separado el ranking de referencia top50.</a:t>
+            </a:r>
+          </a:p>
+        </p:txBody>
+      </p:sp>
+      <p:sp>
+        <p:nvSpPr>
+          <p:cNvPr id="9" name="Texto editable"/>
           <p:cNvSpPr txBox="1"/>
           <p:nvPr/>
         </p:nvSpPr>
@@ -7126,16 +7002,14 @@
           </a:bodyPr>
           <a:lstStyle/>
           <a:p>
-            <a:pPr>
-              <a:defRPr sz="1000" b="0">
+            <a:r>
+              <a:rPr sz="1000" b="0">
                 <a:solidFill>
                   <a:srgbClr val="587177"/>
                 </a:solidFill>
                 <a:latin typeface="Segoe UI"/>
-              </a:defRPr>
-            </a:pPr>
-            <a:r>
-              <a:t>Frecuencia descriptiva, no probabilidad de acierto. La frontera orienta revisión y propuesta de piloto.</a:t>
+              </a:rPr>
+              <a:t>Frecuencia descriptiva. Las variantes comparten datos y pueden equivocarse juntas.</a:t>
             </a:r>
           </a:p>
         </p:txBody>
@@ -7149,7 +7023,7 @@
 </file>
 
 <file path=ppt/slides/slide8.xml><?xml version="1.0" encoding="utf-8"?>
-<p:sld xmlns:a="http://schemas.openxmlformats.org/drawingml/2006/main" xmlns:p="http://schemas.openxmlformats.org/presentationml/2006/main" xmlns:r="http://schemas.openxmlformats.org/officeDocument/2006/relationships">
+<p:sld xmlns:a="http://schemas.openxmlformats.org/drawingml/2006/main" xmlns:p="http://schemas.openxmlformats.org/presentationml/2006/main">
   <p:cSld>
     <p:bg>
       <p:bgPr>
@@ -7168,7 +7042,7 @@
       <p:grpSpPr/>
       <p:sp>
         <p:nvSpPr>
-          <p:cNvPr id="2" name="TextBox 1"/>
+          <p:cNvPr id="3" name="Texto editable"/>
           <p:cNvSpPr txBox="1"/>
           <p:nvPr/>
         </p:nvSpPr>
@@ -7188,15 +7062,13 @@
           </a:bodyPr>
           <a:lstStyle/>
           <a:p>
-            <a:pPr>
-              <a:defRPr sz="1200" b="1">
+            <a:r>
+              <a:rPr sz="1200" b="1">
                 <a:solidFill>
                   <a:srgbClr val="10685F"/>
                 </a:solidFill>
                 <a:latin typeface="Segoe UI"/>
-              </a:defRPr>
-            </a:pPr>
-            <a:r>
+              </a:rPr>
               <a:t>UMBRAL · 08</a:t>
             </a:r>
           </a:p>
@@ -7204,7 +7076,7 @@
       </p:sp>
       <p:sp>
         <p:nvSpPr>
-          <p:cNvPr id="3" name="TextBox 2"/>
+          <p:cNvPr id="4" name="Texto editable"/>
           <p:cNvSpPr txBox="1"/>
           <p:nvPr/>
         </p:nvSpPr>
@@ -7224,23 +7096,21 @@
           </a:bodyPr>
           <a:lstStyle/>
           <a:p>
-            <a:pPr>
-              <a:defRPr sz="3200" b="1">
+            <a:r>
+              <a:rPr sz="3200" b="1">
                 <a:solidFill>
                   <a:srgbClr val="15353B"/>
                 </a:solidFill>
                 <a:latin typeface="Segoe UI"/>
-              </a:defRPr>
-            </a:pPr>
-            <a:r>
-              <a:t>Caso 23008: prioridad que requiere revisión</a:t>
-            </a:r>
-          </a:p>
-        </p:txBody>
-      </p:sp>
-      <p:sp>
-        <p:nvSpPr>
-          <p:cNvPr id="4" name="TextBox 3"/>
+              </a:rPr>
+              <a:t>Caso 23008: SMS con traslado hipotético</a:t>
+            </a:r>
+          </a:p>
+        </p:txBody>
+      </p:sp>
+      <p:sp>
+        <p:nvSpPr>
+          <p:cNvPr id="5" name="Texto editable"/>
           <p:cNvSpPr txBox="1"/>
           <p:nvPr/>
         </p:nvSpPr>
@@ -7260,15 +7130,13 @@
           </a:bodyPr>
           <a:lstStyle/>
           <a:p>
-            <a:pPr>
-              <a:defRPr sz="2400" b="1">
+            <a:r>
+              <a:rPr sz="2400" b="1">
                 <a:solidFill>
                   <a:srgbClr val="10685F"/>
                 </a:solidFill>
                 <a:latin typeface="Segoe UI"/>
-              </a:defRPr>
-            </a:pPr>
-            <a:r>
+              </a:rPr>
               <a:t>SOLIDARIDAD · catálogo histórico de Quintana Roo</a:t>
             </a:r>
           </a:p>
@@ -7276,13 +7144,13 @@
       </p:sp>
       <p:sp>
         <p:nvSpPr>
-          <p:cNvPr id="5" name="TextBox 4"/>
+          <p:cNvPr id="6" name="Texto editable"/>
           <p:cNvSpPr txBox="1"/>
           <p:nvPr/>
         </p:nvSpPr>
         <p:spPr>
           <a:xfrm>
-            <a:off x="594360" y="2538983"/>
+            <a:off x="594360" y="2538984"/>
             <a:ext cx="10881360" cy="914400"/>
           </a:xfrm>
           <a:prstGeom prst="rect">
@@ -7296,29 +7164,27 @@
           </a:bodyPr>
           <a:lstStyle/>
           <a:p>
-            <a:pPr>
-              <a:defRPr sz="2100" b="0">
+            <a:r>
+              <a:rPr sz="2000" b="0">
                 <a:solidFill>
                   <a:srgbClr val="15353B"/>
                 </a:solidFill>
                 <a:latin typeface="Segoe UI"/>
-              </a:defRPr>
-            </a:pPr>
-            <a:r>
-              <a:t>Puesto Ridge 1; referencia 3. Estimación exploratoria 62.11%. Estabilidad 4/6: NS 2021 de 9.60% excluye variantes NS ≤5%.</a:t>
-            </a:r>
-          </a:p>
-        </p:txBody>
-      </p:sp>
-      <p:sp>
-        <p:nvSpPr>
-          <p:cNvPr id="6" name="TextBox 5"/>
+              </a:rPr>
+              <a:t>Puesto Ridge 1, referencia 3. Base 62.106806%. Estabilidad 4/6 del ranking de referencia top50. NS 2021: 9.60%, excluye umbral ≤5%.</a:t>
+            </a:r>
+          </a:p>
+        </p:txBody>
+      </p:sp>
+      <p:sp>
+        <p:nvSpPr>
+          <p:cNvPr id="7" name="Texto editable"/>
           <p:cNvSpPr txBox="1"/>
           <p:nvPr/>
         </p:nvSpPr>
         <p:spPr>
           <a:xfrm>
-            <a:off x="594360" y="3390899"/>
+            <a:off x="594360" y="3359912"/>
             <a:ext cx="10881360" cy="914400"/>
           </a:xfrm>
           <a:prstGeom prst="rect">
@@ -7332,29 +7198,27 @@
           </a:bodyPr>
           <a:lstStyle/>
           <a:p>
-            <a:pPr>
-              <a:defRPr sz="2100" b="0">
+            <a:r>
+              <a:rPr sz="2300" b="0">
                 <a:solidFill>
                   <a:srgbClr val="15353B"/>
                 </a:solidFill>
                 <a:latin typeface="Segoe UI"/>
-              </a:defRPr>
-            </a:pPr>
-            <a:r>
-              <a:t>Acción propuesta: talleres abiertos sobre requisitos y procedimiento. Educación cívica y junta local; sedes y capacidad por validar.</a:t>
-            </a:r>
-          </a:p>
-        </p:txBody>
-      </p:sp>
-      <p:sp>
-        <p:nvSpPr>
-          <p:cNvPr id="7" name="TextBox 6"/>
+              </a:rPr>
+              <a:t>1,000 personas distintas previstas para SMS Suecia: 3 votos adicionales hipotéticos, rango externo 1.3–4.8.</a:t>
+            </a:r>
+          </a:p>
+        </p:txBody>
+      </p:sp>
+      <p:sp>
+        <p:nvSpPr>
+          <p:cNvPr id="8" name="Texto editable"/>
           <p:cNvSpPr txBox="1"/>
           <p:nvPr/>
         </p:nvSpPr>
         <p:spPr>
           <a:xfrm>
-            <a:off x="594360" y="4242816"/>
+            <a:off x="594360" y="4273804"/>
             <a:ext cx="10881360" cy="914400"/>
           </a:xfrm>
           <a:prstGeom prst="rect">
@@ -7368,23 +7232,21 @@
           </a:bodyPr>
           <a:lstStyle/>
           <a:p>
-            <a:pPr>
-              <a:defRPr sz="2100" b="0">
+            <a:r>
+              <a:rPr sz="2100" b="0">
                 <a:solidFill>
                   <a:srgbClr val="15353B"/>
                 </a:solidFill>
                 <a:latin typeface="Segoe UI"/>
-              </a:defRPr>
-            </a:pPr>
-            <a:r>
-              <a:t>1,000 alcanzados y respuesta supuesta 25%: 155.27 adicionales hipotéticos; 62.11% → 62.05%. Permanece alto.</a:t>
-            </a:r>
-          </a:p>
-        </p:txBody>
-      </p:sp>
-      <p:sp>
-        <p:nvSpPr>
-          <p:cNvPr id="8" name="TextBox 7"/>
+              </a:rPr>
+              <a:t>Escenario 62.105631%. Reducción de 0.001175 pp. El efecto publicado proviene de Suecia y su traslado a México requiere evaluación.</a:t>
+            </a:r>
+          </a:p>
+        </p:txBody>
+      </p:sp>
+      <p:sp>
+        <p:nvSpPr>
+          <p:cNvPr id="9" name="Texto editable"/>
           <p:cNvSpPr txBox="1"/>
           <p:nvPr/>
         </p:nvSpPr>
@@ -7404,16 +7266,14 @@
           </a:bodyPr>
           <a:lstStyle/>
           <a:p>
-            <a:pPr>
-              <a:defRPr sz="1000" b="0">
+            <a:r>
+              <a:rPr sz="1000" b="0">
                 <a:solidFill>
                   <a:srgbClr val="587177"/>
                 </a:solidFill>
                 <a:latin typeface="Segoe UI"/>
-              </a:defRPr>
-            </a:pPr>
-            <a:r>
-              <a:t>Configuración nacional: catálogo constante, tasa, Ridge, 50 municipios, estabilidad Todas. Base SV+NV 2024: 255,362.</a:t>
+              </a:rPr>
+              <a:t>Fuente: entrega/caso_municipal.json. SV+NV 2024: 255,362. SMS: Lindgren, Nyman y Oskarsson (2025), DOI 10.1017/S0007123424000504.</a:t>
             </a:r>
           </a:p>
         </p:txBody>
@@ -7427,7 +7287,7 @@
 </file>
 
 <file path=ppt/slides/slide9.xml><?xml version="1.0" encoding="utf-8"?>
-<p:sld xmlns:a="http://schemas.openxmlformats.org/drawingml/2006/main" xmlns:p="http://schemas.openxmlformats.org/presentationml/2006/main" xmlns:r="http://schemas.openxmlformats.org/officeDocument/2006/relationships">
+<p:sld xmlns:a="http://schemas.openxmlformats.org/drawingml/2006/main" xmlns:p="http://schemas.openxmlformats.org/presentationml/2006/main">
   <p:cSld>
     <p:bg>
       <p:bgPr>
@@ -7446,7 +7306,7 @@
       <p:grpSpPr/>
       <p:sp>
         <p:nvSpPr>
-          <p:cNvPr id="2" name="TextBox 1"/>
+          <p:cNvPr id="3" name="Texto editable"/>
           <p:cNvSpPr txBox="1"/>
           <p:nvPr/>
         </p:nvSpPr>
@@ -7466,15 +7326,13 @@
           </a:bodyPr>
           <a:lstStyle/>
           <a:p>
-            <a:pPr>
-              <a:defRPr sz="1200" b="1">
+            <a:r>
+              <a:rPr sz="1200" b="1">
                 <a:solidFill>
                   <a:srgbClr val="10685F"/>
                 </a:solidFill>
                 <a:latin typeface="Segoe UI"/>
-              </a:defRPr>
-            </a:pPr>
-            <a:r>
+              </a:rPr>
               <a:t>UMBRAL · 09</a:t>
             </a:r>
           </a:p>
@@ -7482,7 +7340,7 @@
       </p:sp>
       <p:sp>
         <p:nvSpPr>
-          <p:cNvPr id="3" name="TextBox 2"/>
+          <p:cNvPr id="4" name="Texto editable"/>
           <p:cNvSpPr txBox="1"/>
           <p:nvPr/>
         </p:nvSpPr>
@@ -7502,15 +7360,13 @@
           </a:bodyPr>
           <a:lstStyle/>
           <a:p>
-            <a:pPr>
-              <a:defRPr sz="3200" b="1">
+            <a:r>
+              <a:rPr sz="3200" b="1">
                 <a:solidFill>
                   <a:srgbClr val="15353B"/>
                 </a:solidFill>
                 <a:latin typeface="Segoe UI"/>
-              </a:defRPr>
-            </a:pPr>
-            <a:r>
+              </a:rPr>
               <a:t>De la ficha a un plan verificable</a:t>
             </a:r>
           </a:p>
@@ -7518,7 +7374,7 @@
       </p:sp>
       <p:sp>
         <p:nvSpPr>
-          <p:cNvPr id="4" name="TextBox 3"/>
+          <p:cNvPr id="5" name="Texto editable"/>
           <p:cNvSpPr txBox="1"/>
           <p:nvPr/>
         </p:nvSpPr>
@@ -7538,15 +7394,13 @@
           </a:bodyPr>
           <a:lstStyle/>
           <a:p>
-            <a:pPr>
-              <a:defRPr sz="2500" b="1">
+            <a:r>
+              <a:rPr sz="2500" b="1">
                 <a:solidFill>
                   <a:srgbClr val="10685F"/>
                 </a:solidFill>
                 <a:latin typeface="Segoe UI"/>
-              </a:defRPr>
-            </a:pPr>
-            <a:r>
+              </a:rPr>
               <a:t>Recursos, condiciones y medición</a:t>
             </a:r>
           </a:p>
@@ -7554,13 +7408,13 @@
       </p:sp>
       <p:sp>
         <p:nvSpPr>
-          <p:cNvPr id="5" name="TextBox 4"/>
+          <p:cNvPr id="6" name="Texto editable"/>
           <p:cNvSpPr txBox="1"/>
           <p:nvPr/>
         </p:nvSpPr>
         <p:spPr>
           <a:xfrm>
-            <a:off x="594360" y="2554477"/>
+            <a:off x="594360" y="2554478"/>
             <a:ext cx="10881360" cy="914400"/>
           </a:xfrm>
           <a:prstGeom prst="rect">
@@ -7574,29 +7428,27 @@
           </a:bodyPr>
           <a:lstStyle/>
           <a:p>
-            <a:pPr>
-              <a:defRPr sz="2100" b="0">
+            <a:r>
+              <a:rPr sz="2100" b="0">
                 <a:solidFill>
                   <a:srgbClr val="15353B"/>
                 </a:solidFill>
                 <a:latin typeface="Segoe UI"/>
-              </a:defRPr>
-            </a:pPr>
-            <a:r>
-              <a:t>Exportar acción, responsable propuesto, alcance, supuestos y estabilidad. Capacidad por municipios o por personas alcanzables.</a:t>
-            </a:r>
-          </a:p>
-        </p:txBody>
-      </p:sp>
-      <p:sp>
-        <p:nvSpPr>
-          <p:cNvPr id="6" name="TextBox 5"/>
+              </a:rPr>
+              <a:t>Exportar territorio, acción y cita, cobertura total, distribución, supuestos y estabilidad del plan actual.</a:t>
+            </a:r>
+          </a:p>
+        </p:txBody>
+      </p:sp>
+      <p:sp>
+        <p:nvSpPr>
+          <p:cNvPr id="7" name="Texto editable"/>
           <p:cNvSpPr txBox="1"/>
           <p:nvPr/>
         </p:nvSpPr>
         <p:spPr>
           <a:xfrm>
-            <a:off x="594360" y="3406393"/>
+            <a:off x="594360" y="3406394"/>
             <a:ext cx="10881360" cy="914400"/>
           </a:xfrm>
           <a:prstGeom prst="rect">
@@ -7610,23 +7462,21 @@
           </a:bodyPr>
           <a:lstStyle/>
           <a:p>
-            <a:pPr>
-              <a:defRPr sz="2100" b="0">
+            <a:r>
+              <a:rPr sz="2100" b="0">
                 <a:solidFill>
                   <a:srgbClr val="15353B"/>
                 </a:solidFill>
                 <a:latin typeface="Segoe UI"/>
-              </a:defRPr>
-            </a:pPr>
-            <a:r>
-              <a:t>Registrar alcance único agregado, horas y conocimiento previo/posterior. El perfil joven orienta canales; no demuestra barreras.</a:t>
-            </a:r>
-          </a:p>
-        </p:txBody>
-      </p:sp>
-      <p:sp>
-        <p:nvSpPr>
-          <p:cNvPr id="7" name="TextBox 6"/>
+              </a:rPr>
+              <a:t>Registrar alcance único agregado, horas y conocimiento previo/posterior. El perfil por edad describe grupos agregados y no demuestra barreras.</a:t>
+            </a:r>
+          </a:p>
+        </p:txBody>
+      </p:sp>
+      <p:sp>
+        <p:nvSpPr>
+          <p:cNvPr id="8" name="Texto editable"/>
           <p:cNvSpPr txBox="1"/>
           <p:nvPr/>
         </p:nvSpPr>
@@ -7646,15 +7496,13 @@
           </a:bodyPr>
           <a:lstStyle/>
           <a:p>
-            <a:pPr>
-              <a:defRPr sz="2100" b="0">
+            <a:r>
+              <a:rPr sz="2100" b="0">
                 <a:solidFill>
                   <a:srgbClr val="15353B"/>
                 </a:solidFill>
                 <a:latin typeface="Segoe UI"/>
-              </a:defRPr>
-            </a:pPr>
-            <a:r>
+              </a:rPr>
               <a:t>Validar límites, sedes y atribuciones. Un efecto sobre participación requiere evaluación comparativa y protocolo previo.</a:t>
             </a:r>
           </a:p>
@@ -7662,7 +7510,7 @@
       </p:sp>
       <p:sp>
         <p:nvSpPr>
-          <p:cNvPr id="8" name="TextBox 7"/>
+          <p:cNvPr id="9" name="Texto editable"/>
           <p:cNvSpPr txBox="1"/>
           <p:nvPr/>
         </p:nvSpPr>
@@ -7682,15 +7530,13 @@
           </a:bodyPr>
           <a:lstStyle/>
           <a:p>
-            <a:pPr>
-              <a:defRPr sz="1000" b="0">
+            <a:r>
+              <a:rPr sz="1000" b="0">
                 <a:solidFill>
                   <a:srgbClr val="587177"/>
                 </a:solidFill>
                 <a:latin typeface="Segoe UI"/>
-              </a:defRPr>
-            </a:pPr>
-            <a:r>
+              </a:rPr>
               <a:t>Caso completo: entrega/CASO_MUNICIPAL.md. Guion y demo de tres pasos: entrega/GUION_PRESENTACION.md.</a:t>
             </a:r>
           </a:p>

--- a/02_Prediccion_y_escenarios_de_riesgo/entrega/presentacion/Umbral_presentacion.pptx
+++ b/02_Prediccion_y_escenarios_de_riesgo/entrega/presentacion/Umbral_presentacion.pptx
@@ -4420,7 +4420,7 @@
                 </a:solidFill>
                 <a:latin typeface="Segoe UI"/>
               </a:rPr>
-              <a:t>Tecnocalidos · Hackathon INE 2026 · Track 2</a:t>
+              <a:t>aguas.exe · Hackathon INE 2026 · Track 2</a:t>
             </a:r>
           </a:p>
         </p:txBody>
@@ -4786,7 +4786,7 @@
                 </a:solidFill>
                 <a:latin typeface="Segoe UI"/>
               </a:rPr>
-              <a:t>Equipo: Tecnocalidos. Firmas, registro y envío formal siguen pendientes.</a:t>
+              <a:t>Equipo: aguas.exe. Firmas, registro y envío formal siguen pendientes.</a:t>
             </a:r>
           </a:p>
         </p:txBody>

--- a/02_Prediccion_y_escenarios_de_riesgo/entrega/presentacion/Umbral_presentacion.pptx
+++ b/02_Prediccion_y_escenarios_de_riesgo/entrega/presentacion/Umbral_presentacion.pptx
@@ -681,7 +681,7 @@
           </a:p>
           <a:p>
             <a:r>
-              <a:t>País: México, municipios con estimación incluidos. Los filtros y exclusiones delimitan el alcance. Fuentes primarias: https://ine.mx/transparencia/datos-abiertos/visualizacion-datos/conteos-censales-participacion/ Convocatoria: https://ine.mx/wp-content/uploads/2026/09/Convocatoria_Hackaton-1.pdf</a:t>
+              <a:t>Guía: demo/DEMO6.md. Cartografía municipal y complemento insular INEGI 2025. Fuentes primarias: https://ine.mx/transparencia/datos-abiertos/visualizacion-datos/conteos-censales-participacion/ Convocatoria: https://ine.mx/wp-content/uploads/2026/09/Convocatoria_Hackaton-1.pdf</a:t>
             </a:r>
           </a:p>
         </p:txBody>
@@ -841,7 +841,7 @@
           </a:p>
           <a:p>
             <a:r>
-              <a:t>Fuente: modelado/METODOLOGIA.md y modelado/salidas/metricas.json. No hay ajuste para mejorar 2024. Fuentes primarias: https://ine.mx/transparencia/datos-abiertos/visualizacion-datos/conteos-censales-participacion/ Convocatoria: https://ine.mx/wp-content/uploads/2026/09/Convocatoria_Hackaton-1.pdf</a:t>
+              <a:t>Fuente: modelado/PROTOCOLO_COMPARACION_4_MODELOS.md y salidas/comparacion_modelos/resultados.json. Fuentes primarias: https://ine.mx/transparencia/datos-abiertos/visualizacion-datos/conteos-censales-participacion/ Convocatoria: https://ine.mx/wp-content/uploads/2026/09/Convocatoria_Hackaton-1.pdf</a:t>
             </a:r>
           </a:p>
         </p:txBody>
@@ -921,7 +921,7 @@
           </a:p>
           <a:p>
             <a:r>
-              <a:t>MAE en puntos porcentuales. Ponderación por SV+NV observado del objetivo. Top50 dentro de cada cohorte evaluable. Fuentes primarias: https://ine.mx/transparencia/datos-abiertos/visualizacion-datos/conteos-censales-participacion/ Convocatoria: https://ine.mx/wp-content/uploads/2026/09/Convocatoria_Hackaton-1.pdf</a:t>
+              <a:t>Media de 2021/2024 con igual peso por elección. Referencia adicional: MAE 8.88 pp. No valida 2027. Fuentes primarias: https://ine.mx/transparencia/datos-abiertos/visualizacion-datos/conteos-censales-participacion/ Convocatoria: https://ine.mx/wp-content/uploads/2026/09/Convocatoria_Hackaton-1.pdf</a:t>
             </a:r>
           </a:p>
         </p:txBody>
@@ -1081,7 +1081,7 @@
           </a:p>
           <a:p>
             <a:r>
-              <a:t>Frecuencia descriptiva. Las variantes comparten datos y pueden equivocarse juntas. Fuentes primarias: https://ine.mx/transparencia/datos-abiertos/visualizacion-datos/conteos-censales-participacion/ Convocatoria: https://ine.mx/wp-content/uploads/2026/09/Convocatoria_Hackaton-1.pdf</a:t>
+              <a:t>Demo6. Umbrales nacionales por año y método; fijos entre escenarios. Fuentes primarias: https://ine.mx/transparencia/datos-abiertos/visualizacion-datos/conteos-censales-participacion/ Convocatoria: https://ine.mx/wp-content/uploads/2026/09/Convocatoria_Hackaton-1.pdf</a:t>
             </a:r>
           </a:p>
         </p:txBody>
@@ -1161,7 +1161,7 @@
           </a:p>
           <a:p>
             <a:r>
-              <a:t>Fuente: entrega/caso_municipal.json. SV+NV 2024: 255,362. SMS: Lindgren, Nyman y Oskarsson (2025), DOI 10.1017/S0007123424000504. Fuentes primarias: https://ine.mx/transparencia/datos-abiertos/visualizacion-datos/conteos-censales-participacion/ Convocatoria: https://ine.mx/wp-content/uploads/2026/09/Convocatoria_Hackaton-1.pdf</a:t>
+              <a:t>Fuente: entrega/caso_municipal.json. Modelo seleccionado del benchmark. SV+NV 2024: 255,362. DOI 10.1017/S0007123424000504. Fuentes primarias: https://ine.mx/transparencia/datos-abiertos/visualizacion-datos/conteos-censales-participacion/ Convocatoria: https://ine.mx/wp-content/uploads/2026/09/Convocatoria_Hackaton-1.pdf</a:t>
             </a:r>
           </a:p>
         </p:txBody>
@@ -4264,7 +4264,7 @@
         <p:spPr>
           <a:xfrm>
             <a:off x="594360" y="320040"/>
-            <a:ext cx="10972800" cy="274320"/>
+            <a:ext cx="10972800" cy="259080"/>
           </a:xfrm>
           <a:prstGeom prst="rect">
             <a:avLst/>
@@ -4298,7 +4298,7 @@
         <p:spPr>
           <a:xfrm>
             <a:off x="594360" y="822960"/>
-            <a:ext cx="10972800" cy="1097280"/>
+            <a:ext cx="10972800" cy="754888"/>
           </a:xfrm>
           <a:prstGeom prst="rect">
             <a:avLst/>
@@ -4332,7 +4332,7 @@
         <p:spPr>
           <a:xfrm>
             <a:off x="594360" y="2377440"/>
-            <a:ext cx="10881360" cy="640080"/>
+            <a:ext cx="10881360" cy="506984"/>
           </a:xfrm>
           <a:prstGeom prst="rect">
             <a:avLst/>
@@ -4366,7 +4366,7 @@
         <p:spPr>
           <a:xfrm>
             <a:off x="594360" y="3012440"/>
-            <a:ext cx="10881360" cy="914400"/>
+            <a:ext cx="10881360" cy="414020"/>
           </a:xfrm>
           <a:prstGeom prst="rect">
             <a:avLst/>
@@ -4400,7 +4400,7 @@
         <p:spPr>
           <a:xfrm>
             <a:off x="594360" y="3554476"/>
-            <a:ext cx="10881360" cy="914400"/>
+            <a:ext cx="10881360" cy="352044"/>
           </a:xfrm>
           <a:prstGeom prst="rect">
             <a:avLst/>
@@ -4434,7 +4434,7 @@
         <p:spPr>
           <a:xfrm>
             <a:off x="594360" y="4034536"/>
-            <a:ext cx="10881360" cy="914400"/>
+            <a:ext cx="10881360" cy="336550"/>
           </a:xfrm>
           <a:prstGeom prst="rect">
             <a:avLst/>
@@ -4468,7 +4468,7 @@
         <p:spPr>
           <a:xfrm>
             <a:off x="594360" y="4499102"/>
-            <a:ext cx="10881360" cy="914400"/>
+            <a:ext cx="10881360" cy="336550"/>
           </a:xfrm>
           <a:prstGeom prst="rect">
             <a:avLst/>
@@ -4488,7 +4488,7 @@
                 </a:solidFill>
                 <a:latin typeface="Segoe UI"/>
               </a:rPr>
-              <a:t>Versión técnica · 6 de octubre de 2026</a:t>
+              <a:t>Versión técnica · 16 de octubre de 2026</a:t>
             </a:r>
           </a:p>
         </p:txBody>
@@ -4502,7 +4502,7 @@
         <p:spPr>
           <a:xfrm>
             <a:off x="594360" y="6245352"/>
-            <a:ext cx="10881360" cy="411480"/>
+            <a:ext cx="10881360" cy="228092"/>
           </a:xfrm>
           <a:prstGeom prst="rect">
             <a:avLst/>
@@ -4562,7 +4562,7 @@
         <p:spPr>
           <a:xfrm>
             <a:off x="594360" y="320040"/>
-            <a:ext cx="10972800" cy="274320"/>
+            <a:ext cx="10972800" cy="259080"/>
           </a:xfrm>
           <a:prstGeom prst="rect">
             <a:avLst/>
@@ -4596,7 +4596,7 @@
         <p:spPr>
           <a:xfrm>
             <a:off x="594360" y="822960"/>
-            <a:ext cx="10972800" cy="1097280"/>
+            <a:ext cx="10972800" cy="568960"/>
           </a:xfrm>
           <a:prstGeom prst="rect">
             <a:avLst/>
@@ -4630,7 +4630,7 @@
         <p:spPr>
           <a:xfrm>
             <a:off x="594360" y="1965960"/>
-            <a:ext cx="10881360" cy="914400"/>
+            <a:ext cx="10881360" cy="475996"/>
           </a:xfrm>
           <a:prstGeom prst="rect">
             <a:avLst/>
@@ -4664,7 +4664,7 @@
         <p:spPr>
           <a:xfrm>
             <a:off x="594360" y="2569972"/>
-            <a:ext cx="10881360" cy="914400"/>
+            <a:ext cx="10881360" cy="754888"/>
           </a:xfrm>
           <a:prstGeom prst="rect">
             <a:avLst/>
@@ -4698,7 +4698,7 @@
         <p:spPr>
           <a:xfrm>
             <a:off x="594360" y="3452876"/>
-            <a:ext cx="10881360" cy="914400"/>
+            <a:ext cx="10881360" cy="475996"/>
           </a:xfrm>
           <a:prstGeom prst="rect">
             <a:avLst/>
@@ -4732,7 +4732,7 @@
         <p:spPr>
           <a:xfrm>
             <a:off x="594360" y="4056888"/>
-            <a:ext cx="10881360" cy="914400"/>
+            <a:ext cx="10881360" cy="754888"/>
           </a:xfrm>
           <a:prstGeom prst="rect">
             <a:avLst/>
@@ -4766,7 +4766,7 @@
         <p:spPr>
           <a:xfrm>
             <a:off x="594360" y="4939792"/>
-            <a:ext cx="10881360" cy="914400"/>
+            <a:ext cx="10881360" cy="367538"/>
           </a:xfrm>
           <a:prstGeom prst="rect">
             <a:avLst/>
@@ -4800,7 +4800,7 @@
         <p:spPr>
           <a:xfrm>
             <a:off x="594360" y="6245352"/>
-            <a:ext cx="10881360" cy="411480"/>
+            <a:ext cx="10881360" cy="228092"/>
           </a:xfrm>
           <a:prstGeom prst="rect">
             <a:avLst/>
@@ -4860,7 +4860,7 @@
         <p:spPr>
           <a:xfrm>
             <a:off x="594360" y="320040"/>
-            <a:ext cx="10972800" cy="274320"/>
+            <a:ext cx="10972800" cy="259080"/>
           </a:xfrm>
           <a:prstGeom prst="rect">
             <a:avLst/>
@@ -4894,7 +4894,7 @@
         <p:spPr>
           <a:xfrm>
             <a:off x="594360" y="822960"/>
-            <a:ext cx="10972800" cy="1097280"/>
+            <a:ext cx="10972800" cy="568960"/>
           </a:xfrm>
           <a:prstGeom prst="rect">
             <a:avLst/>
@@ -4914,7 +4914,7 @@
                 </a:solidFill>
                 <a:latin typeface="Segoe UI"/>
               </a:rPr>
-              <a:t>Territorio y cobertura total</a:t>
+              <a:t>Consulta territorial en demo6</a:t>
             </a:r>
           </a:p>
         </p:txBody>
@@ -4928,7 +4928,7 @@
         <p:spPr>
           <a:xfrm>
             <a:off x="594360" y="1965960"/>
-            <a:ext cx="10881360" cy="914400"/>
+            <a:ext cx="10881360" cy="475996"/>
           </a:xfrm>
           <a:prstGeom prst="rect">
             <a:avLst/>
@@ -4962,7 +4962,7 @@
         <p:spPr>
           <a:xfrm>
             <a:off x="594360" y="2569972"/>
-            <a:ext cx="10881360" cy="914400"/>
+            <a:ext cx="10881360" cy="723900"/>
           </a:xfrm>
           <a:prstGeom prst="rect">
             <a:avLst/>
@@ -4982,7 +4982,7 @@
                 </a:solidFill>
                 <a:latin typeface="Segoe UI"/>
               </a:rPr>
-              <a:t>La persona usuaria elige territorio, acción con evidencia y cobertura total. SMS cuenta personas distintas previstas para envío. Llamada cuenta contactos efectivos.</a:t>
+              <a:t>Un mismo año y método para el mapa, el resumen y la ficha. Los históricos muestran resultados observados y 2027 una proyección diferenciada.</a:t>
             </a:r>
           </a:p>
         </p:txBody>
@@ -4996,7 +4996,7 @@
         <p:spPr>
           <a:xfrm>
             <a:off x="594360" y="3421888"/>
-            <a:ext cx="10881360" cy="914400"/>
+            <a:ext cx="10881360" cy="723900"/>
           </a:xfrm>
           <a:prstGeom prst="rect">
             <a:avLst/>
@@ -5016,7 +5016,7 @@
                 </a:solidFill>
                 <a:latin typeface="Segoe UI"/>
               </a:rPr>
-              <a:t>Prioridad concentra por ranking. Proporcional reparte por SV+NV 2024 entre todos los elegibles, con redondeo por mayor resto y tope de población.</a:t>
+              <a:t>Gráfica temporal y comparación con el promedio estatal, ponderados por personas con dato de voto.</a:t>
             </a:r>
           </a:p>
         </p:txBody>
@@ -5030,7 +5030,7 @@
         <p:spPr>
           <a:xfrm>
             <a:off x="594360" y="4273804"/>
-            <a:ext cx="10881360" cy="914400"/>
+            <a:ext cx="10881360" cy="398526"/>
           </a:xfrm>
           <a:prstGeom prst="rect">
             <a:avLst/>
@@ -5044,13 +5044,13 @@
           <a:lstStyle/>
           <a:p>
             <a:r>
-              <a:rPr sz="1900" b="0">
+              <a:rPr sz="2100" b="0">
                 <a:solidFill>
                   <a:srgbClr val="15353B"/>
                 </a:solidFill>
                 <a:latin typeface="Segoe UI"/>
               </a:rPr>
-              <a:t>Estas reglas son decisiones de planeación propias.</a:t>
+              <a:t>La consulta completa se descarga en CSV, aunque no se configure una intervención.</a:t>
             </a:r>
           </a:p>
         </p:txBody>
@@ -5064,7 +5064,7 @@
         <p:spPr>
           <a:xfrm>
             <a:off x="594360" y="6245352"/>
-            <a:ext cx="10881360" cy="411480"/>
+            <a:ext cx="10881360" cy="228092"/>
           </a:xfrm>
           <a:prstGeom prst="rect">
             <a:avLst/>
@@ -5084,7 +5084,7 @@
                 </a:solidFill>
                 <a:latin typeface="Segoe UI"/>
               </a:rPr>
-              <a:t>País: México, municipios con estimación incluidos. Los filtros y exclusiones delimitan el alcance.</a:t>
+              <a:t>Guía: demo/DEMO6.md. Cartografía municipal y complemento insular INEGI 2025.</a:t>
             </a:r>
           </a:p>
         </p:txBody>
@@ -5124,7 +5124,7 @@
         <p:spPr>
           <a:xfrm>
             <a:off x="594360" y="320040"/>
-            <a:ext cx="10972800" cy="274320"/>
+            <a:ext cx="10972800" cy="259080"/>
           </a:xfrm>
           <a:prstGeom prst="rect">
             <a:avLst/>
@@ -5158,7 +5158,7 @@
         <p:spPr>
           <a:xfrm>
             <a:off x="594360" y="822960"/>
-            <a:ext cx="10972800" cy="1097280"/>
+            <a:ext cx="10972800" cy="568960"/>
           </a:xfrm>
           <a:prstGeom prst="rect">
             <a:avLst/>
@@ -5192,7 +5192,7 @@
         <p:spPr>
           <a:xfrm>
             <a:off x="594360" y="1965960"/>
-            <a:ext cx="10881360" cy="640080"/>
+            <a:ext cx="10881360" cy="630936"/>
           </a:xfrm>
           <a:prstGeom prst="rect">
             <a:avLst/>
@@ -5226,7 +5226,7 @@
         <p:spPr>
           <a:xfrm>
             <a:off x="594360" y="2724912"/>
-            <a:ext cx="10881360" cy="914400"/>
+            <a:ext cx="10881360" cy="445008"/>
           </a:xfrm>
           <a:prstGeom prst="rect">
             <a:avLst/>
@@ -5260,7 +5260,7 @@
         <p:spPr>
           <a:xfrm>
             <a:off x="594360" y="3297936"/>
-            <a:ext cx="10881360" cy="914400"/>
+            <a:ext cx="10881360" cy="445008"/>
           </a:xfrm>
           <a:prstGeom prst="rect">
             <a:avLst/>
@@ -5294,7 +5294,7 @@
         <p:spPr>
           <a:xfrm>
             <a:off x="594360" y="3870960"/>
-            <a:ext cx="10881360" cy="914400"/>
+            <a:ext cx="10881360" cy="692912"/>
           </a:xfrm>
           <a:prstGeom prst="rect">
             <a:avLst/>
@@ -5328,7 +5328,7 @@
         <p:spPr>
           <a:xfrm>
             <a:off x="594360" y="4691888"/>
-            <a:ext cx="10881360" cy="914400"/>
+            <a:ext cx="10881360" cy="692912"/>
           </a:xfrm>
           <a:prstGeom prst="rect">
             <a:avLst/>
@@ -5362,7 +5362,7 @@
         <p:spPr>
           <a:xfrm>
             <a:off x="594360" y="6245352"/>
-            <a:ext cx="10881360" cy="411480"/>
+            <a:ext cx="10881360" cy="228092"/>
           </a:xfrm>
           <a:prstGeom prst="rect">
             <a:avLst/>
@@ -5422,7 +5422,7 @@
         <p:spPr>
           <a:xfrm>
             <a:off x="594360" y="320040"/>
-            <a:ext cx="10972800" cy="274320"/>
+            <a:ext cx="10972800" cy="259080"/>
           </a:xfrm>
           <a:prstGeom prst="rect">
             <a:avLst/>
@@ -5456,7 +5456,7 @@
         <p:spPr>
           <a:xfrm>
             <a:off x="594360" y="822960"/>
-            <a:ext cx="10972800" cy="1097280"/>
+            <a:ext cx="10972800" cy="568960"/>
           </a:xfrm>
           <a:prstGeom prst="rect">
             <a:avLst/>
@@ -5476,7 +5476,7 @@
                 </a:solidFill>
                 <a:latin typeface="Segoe UI"/>
               </a:rPr>
-              <a:t>La referencia también compite</a:t>
+              <a:t>Cuatro modelos, una comparación temporal</a:t>
             </a:r>
           </a:p>
         </p:txBody>
@@ -5490,7 +5490,7 @@
         <p:spPr>
           <a:xfrm>
             <a:off x="594360" y="1965960"/>
-            <a:ext cx="10881360" cy="914400"/>
+            <a:ext cx="10881360" cy="460502"/>
           </a:xfrm>
           <a:prstGeom prst="rect">
             <a:avLst/>
@@ -5504,13 +5504,13 @@
           <a:lstStyle/>
           <a:p>
             <a:r>
-              <a:rPr sz="2400" b="1">
+              <a:rPr sz="2500" b="1">
                 <a:solidFill>
                   <a:srgbClr val="10685F"/>
                 </a:solidFill>
                 <a:latin typeface="Segoe UI"/>
               </a:rPr>
-              <a:t>Referencia: última elección del mismo tipo</a:t>
+              <a:t>Misma cohorte y 15 variables históricas</a:t>
             </a:r>
           </a:p>
         </p:txBody>
@@ -5523,8 +5523,8 @@
         </p:nvSpPr>
         <p:spPr>
           <a:xfrm>
-            <a:off x="594360" y="2538984"/>
-            <a:ext cx="10881360" cy="914400"/>
+            <a:off x="594360" y="2554478"/>
+            <a:ext cx="10881360" cy="723900"/>
           </a:xfrm>
           <a:prstGeom prst="rect">
             <a:avLst/>
@@ -5538,13 +5538,13 @@
           <a:lstStyle/>
           <a:p>
             <a:r>
-              <a:rPr sz="2200" b="0">
+              <a:rPr sz="2100" b="0">
                 <a:solidFill>
                   <a:srgbClr val="15353B"/>
                 </a:solidFill>
                 <a:latin typeface="Segoe UI"/>
               </a:rPr>
-              <a:t>Para 2027 usa 2021. Ridge estima un ajuste con historia electoral, edad agregada, urbanización y calidad.</a:t>
+              <a:t>Ridge, HistGradientBoosting, LightGBM y CatBoost aprenden el residual respecto a la referencia homóloga.</a:t>
             </a:r>
           </a:p>
         </p:txBody>
@@ -5557,8 +5557,8 @@
         </p:nvSpPr>
         <p:spPr>
           <a:xfrm>
-            <a:off x="594360" y="3421888"/>
-            <a:ext cx="10881360" cy="914400"/>
+            <a:off x="594360" y="3406394"/>
+            <a:ext cx="10881360" cy="723900"/>
           </a:xfrm>
           <a:prstGeom prst="rect">
             <a:avLst/>
@@ -5572,13 +5572,13 @@
           <a:lstStyle/>
           <a:p>
             <a:r>
-              <a:rPr sz="2200" b="0">
+              <a:rPr sz="2100" b="0">
                 <a:solidFill>
                   <a:srgbClr val="15353B"/>
                 </a:solidFill>
                 <a:latin typeface="Segoe UI"/>
               </a:rPr>
-              <a:t>Alpha = 10 permanece congelado. Cada corte aprende con resultados anteriores al año objetivo.</a:t>
+              <a:t>Los parámetros se eligen con años anteriores al corte evaluado. Sin parada temprana sobre 2021 o 2024.</a:t>
             </a:r>
           </a:p>
         </p:txBody>
@@ -5591,8 +5591,8 @@
         </p:nvSpPr>
         <p:spPr>
           <a:xfrm>
-            <a:off x="594360" y="4304792"/>
-            <a:ext cx="10881360" cy="914400"/>
+            <a:off x="594360" y="4258310"/>
+            <a:ext cx="10881360" cy="398526"/>
           </a:xfrm>
           <a:prstGeom prst="rect">
             <a:avLst/>
@@ -5606,13 +5606,13 @@
           <a:lstStyle/>
           <a:p>
             <a:r>
-              <a:rPr sz="2000" b="0">
+              <a:rPr sz="2100" b="0">
                 <a:solidFill>
                   <a:srgbClr val="15353B"/>
                 </a:solidFill>
                 <a:latin typeface="Segoe UI"/>
               </a:rPr>
-              <a:t>2021 seleccionó el método. Ese corte no es una prueba independiente posterior a la selección.</a:t>
+              <a:t>Protocolo previo, cuatro configuraciones por familia, semilla 42 y un hilo de CPU.</a:t>
             </a:r>
           </a:p>
         </p:txBody>
@@ -5626,7 +5626,7 @@
         <p:spPr>
           <a:xfrm>
             <a:off x="594360" y="6245352"/>
-            <a:ext cx="10881360" cy="411480"/>
+            <a:ext cx="10881360" cy="228092"/>
           </a:xfrm>
           <a:prstGeom prst="rect">
             <a:avLst/>
@@ -5646,7 +5646,7 @@
                 </a:solidFill>
                 <a:latin typeface="Segoe UI"/>
               </a:rPr>
-              <a:t>Fuente: modelado/METODOLOGIA.md y modelado/salidas/metricas.json. No hay ajuste para mejorar 2024.</a:t>
+              <a:t>Fuente: modelado/PROTOCOLO_COMPARACION_4_MODELOS.md y salidas/comparacion_modelos/resultados.json.</a:t>
             </a:r>
           </a:p>
         </p:txBody>
@@ -5686,7 +5686,7 @@
         <p:spPr>
           <a:xfrm>
             <a:off x="594360" y="320040"/>
-            <a:ext cx="10972800" cy="274320"/>
+            <a:ext cx="10972800" cy="259080"/>
           </a:xfrm>
           <a:prstGeom prst="rect">
             <a:avLst/>
@@ -5720,7 +5720,7 @@
         <p:spPr>
           <a:xfrm>
             <a:off x="594360" y="822960"/>
-            <a:ext cx="10972800" cy="1097280"/>
+            <a:ext cx="10972800" cy="568960"/>
           </a:xfrm>
           <a:prstGeom prst="rect">
             <a:avLst/>
@@ -5740,7 +5740,7 @@
                 </a:solidFill>
                 <a:latin typeface="Segoe UI"/>
               </a:rPr>
-              <a:t>Ridge mejora en 2021 y empeora en 2024</a:t>
+              <a:t>HistGradientBoosting seleccionado</a:t>
             </a:r>
           </a:p>
         </p:txBody>
@@ -5785,7 +5785,7 @@
                         </a:defRPr>
                       </a:pPr>
                       <a:r>
-                        <a:t>Corte / método</a:t>
+                        <a:t>Modelo</a:t>
                       </a:r>
                     </a:p>
                   </a:txBody>
@@ -5809,31 +5809,7 @@
                         </a:defRPr>
                       </a:pPr>
                       <a:r>
-                        <a:t>n</a:t>
-                      </a:r>
-                    </a:p>
-                  </a:txBody>
-                  <a:tcPr>
-                    <a:solidFill>
-                      <a:srgbClr val="E5EEEA"/>
-                    </a:solidFill>
-                  </a:tcPr>
-                </a:tc>
-                <a:tc>
-                  <a:txBody>
-                    <a:bodyPr/>
-                    <a:lstStyle/>
-                    <a:p>
-                      <a:pPr>
-                        <a:defRPr sz="2000" b="1">
-                          <a:solidFill>
-                            <a:srgbClr val="15353B"/>
-                          </a:solidFill>
-                          <a:latin typeface="Segoe UI"/>
-                        </a:defRPr>
-                      </a:pPr>
-                      <a:r>
-                        <a:t>MAE (pp)</a:t>
+                        <a:t>MAE medio</a:t>
                       </a:r>
                     </a:p>
                   </a:txBody>
@@ -5881,7 +5857,31 @@
                         </a:defRPr>
                       </a:pPr>
                       <a:r>
-                        <a:t>Top50</a:t>
+                        <a:t>Top50 medio</a:t>
+                      </a:r>
+                    </a:p>
+                  </a:txBody>
+                  <a:tcPr>
+                    <a:solidFill>
+                      <a:srgbClr val="E5EEEA"/>
+                    </a:solidFill>
+                  </a:tcPr>
+                </a:tc>
+                <a:tc>
+                  <a:txBody>
+                    <a:bodyPr/>
+                    <a:lstStyle/>
+                    <a:p>
+                      <a:pPr>
+                        <a:defRPr sz="2000" b="1">
+                          <a:solidFill>
+                            <a:srgbClr val="15353B"/>
+                          </a:solidFill>
+                          <a:latin typeface="Segoe UI"/>
+                        </a:defRPr>
+                      </a:pPr>
+                      <a:r>
+                        <a:t>Ajustar ms</a:t>
                       </a:r>
                     </a:p>
                   </a:txBody>
@@ -5907,7 +5907,7 @@
                         </a:defRPr>
                       </a:pPr>
                       <a:r>
-                        <a:t>2021 · Referencia</a:t>
+                        <a:t>HistGradientBoosting</a:t>
                       </a:r>
                     </a:p>
                   </a:txBody>
@@ -5931,7 +5931,7 @@
                         </a:defRPr>
                       </a:pPr>
                       <a:r>
-                        <a:t>1,490</a:t>
+                        <a:t>6.84</a:t>
                       </a:r>
                     </a:p>
                   </a:txBody>
@@ -5955,7 +5955,7 @@
                         </a:defRPr>
                       </a:pPr>
                       <a:r>
-                        <a:t>12.12</a:t>
+                        <a:t>4.67</a:t>
                       </a:r>
                     </a:p>
                   </a:txBody>
@@ -5979,7 +5979,7 @@
                         </a:defRPr>
                       </a:pPr>
                       <a:r>
-                        <a:t>8.05</a:t>
+                        <a:t>20.0/50</a:t>
                       </a:r>
                     </a:p>
                   </a:txBody>
@@ -6003,7 +6003,7 @@
                         </a:defRPr>
                       </a:pPr>
                       <a:r>
-                        <a:t>16/50</a:t>
+                        <a:t>199.6</a:t>
                       </a:r>
                     </a:p>
                   </a:txBody>
@@ -6029,7 +6029,7 @@
                         </a:defRPr>
                       </a:pPr>
                       <a:r>
-                        <a:t>2021 · Ridge</a:t>
+                        <a:t>LightGBM</a:t>
                       </a:r>
                     </a:p>
                   </a:txBody>
@@ -6053,7 +6053,7 @@
                         </a:defRPr>
                       </a:pPr>
                       <a:r>
-                        <a:t>1,490</a:t>
+                        <a:t>6.83</a:t>
                       </a:r>
                     </a:p>
                   </a:txBody>
@@ -6077,7 +6077,7 @@
                         </a:defRPr>
                       </a:pPr>
                       <a:r>
-                        <a:t>9.21</a:t>
+                        <a:t>4.84</a:t>
                       </a:r>
                     </a:p>
                   </a:txBody>
@@ -6101,7 +6101,7 @@
                         </a:defRPr>
                       </a:pPr>
                       <a:r>
-                        <a:t>5.49</a:t>
+                        <a:t>21.0/50</a:t>
                       </a:r>
                     </a:p>
                   </a:txBody>
@@ -6125,7 +6125,7 @@
                         </a:defRPr>
                       </a:pPr>
                       <a:r>
-                        <a:t>19/50</a:t>
+                        <a:t>126.6</a:t>
                       </a:r>
                     </a:p>
                   </a:txBody>
@@ -6151,7 +6151,7 @@
                         </a:defRPr>
                       </a:pPr>
                       <a:r>
-                        <a:t>2024 · Referencia</a:t>
+                        <a:t>CatBoost</a:t>
                       </a:r>
                     </a:p>
                   </a:txBody>
@@ -6175,7 +6175,7 @@
                         </a:defRPr>
                       </a:pPr>
                       <a:r>
-                        <a:t>1,476</a:t>
+                        <a:t>6.91</a:t>
                       </a:r>
                     </a:p>
                   </a:txBody>
@@ -6199,7 +6199,7 @@
                         </a:defRPr>
                       </a:pPr>
                       <a:r>
-                        <a:t>5.64</a:t>
+                        <a:t>4.67</a:t>
                       </a:r>
                     </a:p>
                   </a:txBody>
@@ -6223,7 +6223,7 @@
                         </a:defRPr>
                       </a:pPr>
                       <a:r>
-                        <a:t>3.54</a:t>
+                        <a:t>20.5/50</a:t>
                       </a:r>
                     </a:p>
                   </a:txBody>
@@ -6247,7 +6247,7 @@
                         </a:defRPr>
                       </a:pPr>
                       <a:r>
-                        <a:t>27/50</a:t>
+                        <a:t>1045.2</a:t>
                       </a:r>
                     </a:p>
                   </a:txBody>
@@ -6273,7 +6273,7 @@
                         </a:defRPr>
                       </a:pPr>
                       <a:r>
-                        <a:t>2024 · Ridge</a:t>
+                        <a:t>Ridge</a:t>
                       </a:r>
                     </a:p>
                   </a:txBody>
@@ -6297,7 +6297,7 @@
                         </a:defRPr>
                       </a:pPr>
                       <a:r>
-                        <a:t>1,476</a:t>
+                        <a:t>9.01</a:t>
                       </a:r>
                     </a:p>
                   </a:txBody>
@@ -6321,7 +6321,7 @@
                         </a:defRPr>
                       </a:pPr>
                       <a:r>
-                        <a:t>8.58</a:t>
+                        <a:t>5.22</a:t>
                       </a:r>
                     </a:p>
                   </a:txBody>
@@ -6345,7 +6345,7 @@
                         </a:defRPr>
                       </a:pPr>
                       <a:r>
-                        <a:t>4.49</a:t>
+                        <a:t>20.0/50</a:t>
                       </a:r>
                     </a:p>
                   </a:txBody>
@@ -6369,7 +6369,7 @@
                         </a:defRPr>
                       </a:pPr>
                       <a:r>
-                        <a:t>27/50</a:t>
+                        <a:t>12.8</a:t>
                       </a:r>
                     </a:p>
                   </a:txBody>
@@ -6413,7 +6413,7 @@
                 </a:solidFill>
                 <a:latin typeface="Segoe UI"/>
               </a:rPr>
-              <a:t>La evidencia no demuestra superioridad consistente.</a:t>
+              <a:t>MAE medio 24.1% menor que Ridge.</a:t>
             </a:r>
           </a:p>
         </p:txBody>
@@ -6447,7 +6447,7 @@
                 </a:solidFill>
                 <a:latin typeface="Segoe UI"/>
               </a:rPr>
-              <a:t>Spearman referencia / Ridge: 0.485 / 0.599 en 2021 y 0.827 / 0.811 en 2024. Análisis posterior, sin reajuste del modelo.</a:t>
+              <a:t>Empate de MAE con tolerancia 0.05 pp; gana por error ponderado. Ridge es el más rápido. Selección retrospectiva.</a:t>
             </a:r>
           </a:p>
         </p:txBody>
@@ -6461,7 +6461,7 @@
         <p:spPr>
           <a:xfrm>
             <a:off x="594360" y="6245352"/>
-            <a:ext cx="10881360" cy="411480"/>
+            <a:ext cx="10881360" cy="228092"/>
           </a:xfrm>
           <a:prstGeom prst="rect">
             <a:avLst/>
@@ -6481,7 +6481,7 @@
                 </a:solidFill>
                 <a:latin typeface="Segoe UI"/>
               </a:rPr>
-              <a:t>MAE en puntos porcentuales. Ponderación por SV+NV observado del objetivo. Top50 dentro de cada cohorte evaluable.</a:t>
+              <a:t>Media de 2021/2024 con igual peso por elección. Referencia adicional: MAE 8.88 pp. No valida 2027.</a:t>
             </a:r>
           </a:p>
         </p:txBody>
@@ -6521,7 +6521,7 @@
         <p:spPr>
           <a:xfrm>
             <a:off x="594360" y="320040"/>
-            <a:ext cx="10972800" cy="274320"/>
+            <a:ext cx="10972800" cy="259080"/>
           </a:xfrm>
           <a:prstGeom prst="rect">
             <a:avLst/>
@@ -6555,7 +6555,7 @@
         <p:spPr>
           <a:xfrm>
             <a:off x="594360" y="822960"/>
-            <a:ext cx="10972800" cy="1097280"/>
+            <a:ext cx="10972800" cy="568960"/>
           </a:xfrm>
           <a:prstGeom prst="rect">
             <a:avLst/>
@@ -6589,7 +6589,7 @@
         <p:spPr>
           <a:xfrm>
             <a:off x="594360" y="1965960"/>
-            <a:ext cx="10881360" cy="914400"/>
+            <a:ext cx="10881360" cy="460502"/>
           </a:xfrm>
           <a:prstGeom prst="rect">
             <a:avLst/>
@@ -6623,7 +6623,7 @@
         <p:spPr>
           <a:xfrm>
             <a:off x="594360" y="2554478"/>
-            <a:ext cx="10881360" cy="914400"/>
+            <a:ext cx="10881360" cy="692912"/>
           </a:xfrm>
           <a:prstGeom prst="rect">
             <a:avLst/>
@@ -6691,7 +6691,7 @@
         <p:spPr>
           <a:xfrm>
             <a:off x="594360" y="4552696"/>
-            <a:ext cx="10881360" cy="914400"/>
+            <a:ext cx="10881360" cy="692912"/>
           </a:xfrm>
           <a:prstGeom prst="rect">
             <a:avLst/>
@@ -6725,7 +6725,7 @@
         <p:spPr>
           <a:xfrm>
             <a:off x="594360" y="6245352"/>
-            <a:ext cx="10881360" cy="411480"/>
+            <a:ext cx="10881360" cy="228092"/>
           </a:xfrm>
           <a:prstGeom prst="rect">
             <a:avLst/>
@@ -6785,7 +6785,7 @@
         <p:spPr>
           <a:xfrm>
             <a:off x="594360" y="320040"/>
-            <a:ext cx="10972800" cy="274320"/>
+            <a:ext cx="10972800" cy="259080"/>
           </a:xfrm>
           <a:prstGeom prst="rect">
             <a:avLst/>
@@ -6819,7 +6819,7 @@
         <p:spPr>
           <a:xfrm>
             <a:off x="594360" y="822960"/>
-            <a:ext cx="10972800" cy="1097280"/>
+            <a:ext cx="10972800" cy="568960"/>
           </a:xfrm>
           <a:prstGeom prst="rect">
             <a:avLst/>
@@ -6839,7 +6839,7 @@
                 </a:solidFill>
                 <a:latin typeface="Segoe UI"/>
               </a:rPr>
-              <a:t>Una ficha para revisar cada prioridad</a:t>
+              <a:t>Una ficha para entender la selección</a:t>
             </a:r>
           </a:p>
         </p:txBody>
@@ -6853,7 +6853,7 @@
         <p:spPr>
           <a:xfrm>
             <a:off x="594360" y="1965960"/>
-            <a:ext cx="10881360" cy="914400"/>
+            <a:ext cx="10881360" cy="460502"/>
           </a:xfrm>
           <a:prstGeom prst="rect">
             <a:avLst/>
@@ -6867,13 +6867,13 @@
           <a:lstStyle/>
           <a:p>
             <a:r>
-              <a:rPr sz="2600" b="1">
+              <a:rPr sz="2500" b="1">
                 <a:solidFill>
                   <a:srgbClr val="10685F"/>
                 </a:solidFill>
                 <a:latin typeface="Segoe UI"/>
               </a:rPr>
-              <a:t>¿Por qué este municipio?</a:t>
+              <a:t>Resultados observados y proyección diferenciados</a:t>
             </a:r>
           </a:p>
         </p:txBody>
@@ -6886,8 +6886,8 @@
         </p:nvSpPr>
         <p:spPr>
           <a:xfrm>
-            <a:off x="594360" y="2569972"/>
-            <a:ext cx="10881360" cy="914400"/>
+            <a:off x="594360" y="2554478"/>
+            <a:ext cx="10881360" cy="723900"/>
           </a:xfrm>
           <a:prstGeom prst="rect">
             <a:avLst/>
@@ -6907,7 +6907,7 @@
                 </a:solidFill>
                 <a:latin typeface="Segoe UI"/>
               </a:rPr>
-              <a:t>Puesto, antecedentes, calidad NS y acuerdo entre referencia y Ridge. Perfil CCPC por grupos como capa descriptiva separada.</a:t>
+              <a:t>Serie temporal 2009–2024 con 2027 separado visualmente. Faltantes visibles y cobertura declarada.</a:t>
             </a:r>
           </a:p>
         </p:txBody>
@@ -6920,8 +6920,8 @@
         </p:nvSpPr>
         <p:spPr>
           <a:xfrm>
-            <a:off x="594360" y="3421888"/>
-            <a:ext cx="10881360" cy="914400"/>
+            <a:off x="594360" y="3406394"/>
+            <a:ext cx="10881360" cy="723900"/>
           </a:xfrm>
           <a:prstGeom prst="rect">
             <a:avLst/>
@@ -6935,13 +6935,13 @@
           <a:lstStyle/>
           <a:p>
             <a:r>
-              <a:rPr sz="2200" b="0">
+              <a:rPr sz="2100" b="0">
                 <a:solidFill>
                   <a:srgbClr val="15353B"/>
                 </a:solidFill>
                 <a:latin typeface="Segoe UI"/>
               </a:rPr>
-              <a:t>Frecuencia entre seis variantes: dos métodos × NS 5/10/20. N equivale a municipios atendidos del plan actual.</a:t>
+              <a:t>Brecha municipal frente al estado con el mismo método y denominador. Las diferencias agregadas no identifican causas.</a:t>
             </a:r>
           </a:p>
         </p:txBody>
@@ -6954,8 +6954,8 @@
         </p:nvSpPr>
         <p:spPr>
           <a:xfrm>
-            <a:off x="594360" y="4304792"/>
-            <a:ext cx="10881360" cy="914400"/>
+            <a:off x="594360" y="4258310"/>
+            <a:ext cx="10881360" cy="723900"/>
           </a:xfrm>
           <a:prstGeom prst="rect">
             <a:avLst/>
@@ -6975,7 +6975,7 @@
                 </a:solidFill>
                 <a:latin typeface="Segoe UI"/>
               </a:rPr>
-              <a:t>Compara rankings con N equivalente. No recalcula presupuesto ni reparto y no es probabilidad. El caso 23008 documenta por separado el ranking de referencia top50.</a:t>
+              <a:t>Métricas reales y coeficientes Ridge disponibles. Los coeficientes no son efectos causales ni explicaciones individuales.</a:t>
             </a:r>
           </a:p>
         </p:txBody>
@@ -6989,7 +6989,7 @@
         <p:spPr>
           <a:xfrm>
             <a:off x="594360" y="6245352"/>
-            <a:ext cx="10881360" cy="411480"/>
+            <a:ext cx="10881360" cy="228092"/>
           </a:xfrm>
           <a:prstGeom prst="rect">
             <a:avLst/>
@@ -7009,7 +7009,7 @@
                 </a:solidFill>
                 <a:latin typeface="Segoe UI"/>
               </a:rPr>
-              <a:t>Frecuencia descriptiva. Las variantes comparten datos y pueden equivocarse juntas.</a:t>
+              <a:t>Demo6. Umbrales nacionales por año y método; fijos entre escenarios.</a:t>
             </a:r>
           </a:p>
         </p:txBody>
@@ -7049,7 +7049,7 @@
         <p:spPr>
           <a:xfrm>
             <a:off x="594360" y="320040"/>
-            <a:ext cx="10972800" cy="274320"/>
+            <a:ext cx="10972800" cy="259080"/>
           </a:xfrm>
           <a:prstGeom prst="rect">
             <a:avLst/>
@@ -7083,7 +7083,7 @@
         <p:spPr>
           <a:xfrm>
             <a:off x="594360" y="822960"/>
-            <a:ext cx="10972800" cy="1097280"/>
+            <a:ext cx="10972800" cy="568960"/>
           </a:xfrm>
           <a:prstGeom prst="rect">
             <a:avLst/>
@@ -7117,7 +7117,7 @@
         <p:spPr>
           <a:xfrm>
             <a:off x="594360" y="1965960"/>
-            <a:ext cx="10881360" cy="914400"/>
+            <a:ext cx="10881360" cy="445008"/>
           </a:xfrm>
           <a:prstGeom prst="rect">
             <a:avLst/>
@@ -7151,7 +7151,7 @@
         <p:spPr>
           <a:xfrm>
             <a:off x="594360" y="2538984"/>
-            <a:ext cx="10881360" cy="914400"/>
+            <a:ext cx="10881360" cy="723900"/>
           </a:xfrm>
           <a:prstGeom prst="rect">
             <a:avLst/>
@@ -7165,13 +7165,13 @@
           <a:lstStyle/>
           <a:p>
             <a:r>
-              <a:rPr sz="2000" b="0">
+              <a:rPr sz="2100" b="0">
                 <a:solidFill>
                   <a:srgbClr val="15353B"/>
                 </a:solidFill>
                 <a:latin typeface="Segoe UI"/>
               </a:rPr>
-              <a:t>Puesto Ridge 1, referencia 3. Base 62.106806%. Estabilidad 4/6 del ranking de referencia top50. NS 2021: 9.60%, excluye umbral ≤5%.</a:t>
+              <a:t>HistGradientBoosting, puesto 9; referencia 3. Base 61.636222%. Frecuencia nacional top50 4/6.</a:t>
             </a:r>
           </a:p>
         </p:txBody>
@@ -7184,8 +7184,8 @@
         </p:nvSpPr>
         <p:spPr>
           <a:xfrm>
-            <a:off x="594360" y="3359912"/>
-            <a:ext cx="10881360" cy="914400"/>
+            <a:off x="594360" y="3390900"/>
+            <a:ext cx="10881360" cy="754888"/>
           </a:xfrm>
           <a:prstGeom prst="rect">
             <a:avLst/>
@@ -7199,13 +7199,13 @@
           <a:lstStyle/>
           <a:p>
             <a:r>
-              <a:rPr sz="2300" b="0">
+              <a:rPr sz="2200" b="0">
                 <a:solidFill>
                   <a:srgbClr val="15353B"/>
                 </a:solidFill>
                 <a:latin typeface="Segoe UI"/>
               </a:rPr>
-              <a:t>1,000 personas distintas previstas para SMS Suecia: 3 votos adicionales hipotéticos, rango externo 1.3–4.8.</a:t>
+              <a:t>1,000 personas asignadas a SMS Suecia: 3 votos adicionales hipotéticos; rango externo 1.3–4.8.</a:t>
             </a:r>
           </a:p>
         </p:txBody>
@@ -7219,7 +7219,7 @@
         <p:spPr>
           <a:xfrm>
             <a:off x="594360" y="4273804"/>
-            <a:ext cx="10881360" cy="914400"/>
+            <a:ext cx="10881360" cy="398526"/>
           </a:xfrm>
           <a:prstGeom prst="rect">
             <a:avLst/>
@@ -7239,7 +7239,7 @@
                 </a:solidFill>
                 <a:latin typeface="Segoe UI"/>
               </a:rPr>
-              <a:t>Escenario 62.105631%. Reducción de 0.001175 pp. El efecto publicado proviene de Suecia y su traslado a México requiere evaluación.</a:t>
+              <a:t>Posterior 61.635048%. Reducción 0.001175 pp. Traslado a México sujeto a evaluación.</a:t>
             </a:r>
           </a:p>
         </p:txBody>
@@ -7253,7 +7253,7 @@
         <p:spPr>
           <a:xfrm>
             <a:off x="594360" y="6245352"/>
-            <a:ext cx="10881360" cy="411480"/>
+            <a:ext cx="10881360" cy="228092"/>
           </a:xfrm>
           <a:prstGeom prst="rect">
             <a:avLst/>
@@ -7273,7 +7273,7 @@
                 </a:solidFill>
                 <a:latin typeface="Segoe UI"/>
               </a:rPr>
-              <a:t>Fuente: entrega/caso_municipal.json. SV+NV 2024: 255,362. SMS: Lindgren, Nyman y Oskarsson (2025), DOI 10.1017/S0007123424000504.</a:t>
+              <a:t>Fuente: entrega/caso_municipal.json. Modelo seleccionado del benchmark. SV+NV 2024: 255,362. DOI 10.1017/S0007123424000504.</a:t>
             </a:r>
           </a:p>
         </p:txBody>
@@ -7313,7 +7313,7 @@
         <p:spPr>
           <a:xfrm>
             <a:off x="594360" y="320040"/>
-            <a:ext cx="10972800" cy="274320"/>
+            <a:ext cx="10972800" cy="259080"/>
           </a:xfrm>
           <a:prstGeom prst="rect">
             <a:avLst/>
@@ -7347,7 +7347,7 @@
         <p:spPr>
           <a:xfrm>
             <a:off x="594360" y="822960"/>
-            <a:ext cx="10972800" cy="1097280"/>
+            <a:ext cx="10972800" cy="568960"/>
           </a:xfrm>
           <a:prstGeom prst="rect">
             <a:avLst/>
@@ -7381,7 +7381,7 @@
         <p:spPr>
           <a:xfrm>
             <a:off x="594360" y="1965960"/>
-            <a:ext cx="10881360" cy="914400"/>
+            <a:ext cx="10881360" cy="460502"/>
           </a:xfrm>
           <a:prstGeom prst="rect">
             <a:avLst/>
@@ -7415,7 +7415,7 @@
         <p:spPr>
           <a:xfrm>
             <a:off x="594360" y="2554478"/>
-            <a:ext cx="10881360" cy="914400"/>
+            <a:ext cx="10881360" cy="723900"/>
           </a:xfrm>
           <a:prstGeom prst="rect">
             <a:avLst/>
@@ -7449,7 +7449,7 @@
         <p:spPr>
           <a:xfrm>
             <a:off x="594360" y="3406394"/>
-            <a:ext cx="10881360" cy="914400"/>
+            <a:ext cx="10881360" cy="723900"/>
           </a:xfrm>
           <a:prstGeom prst="rect">
             <a:avLst/>
@@ -7483,7 +7483,7 @@
         <p:spPr>
           <a:xfrm>
             <a:off x="594360" y="4258310"/>
-            <a:ext cx="10881360" cy="914400"/>
+            <a:ext cx="10881360" cy="723900"/>
           </a:xfrm>
           <a:prstGeom prst="rect">
             <a:avLst/>
@@ -7517,7 +7517,7 @@
         <p:spPr>
           <a:xfrm>
             <a:off x="594360" y="6245352"/>
-            <a:ext cx="10881360" cy="411480"/>
+            <a:ext cx="10881360" cy="228092"/>
           </a:xfrm>
           <a:prstGeom prst="rect">
             <a:avLst/>

--- a/02_Prediccion_y_escenarios_de_riesgo/entrega/presentacion/Umbral_presentacion.pptx
+++ b/02_Prediccion_y_escenarios_de_riesgo/entrega/presentacion/Umbral_presentacion.pptx
@@ -681,7 +681,7 @@
           </a:p>
           <a:p>
             <a:r>
-              <a:t>Guía: demo/DEMO6.md. Cartografía municipal y complemento insular INEGI 2025. Fuentes primarias: https://ine.mx/transparencia/datos-abiertos/visualizacion-datos/conteos-censales-participacion/ Convocatoria: https://ine.mx/wp-content/uploads/2026/09/Convocatoria_Hackaton-1.pdf</a:t>
+              <a:t>Guía: demo/DEMO7.md. Cartografía municipal y complemento insular INEGI 2025. Fuentes primarias: https://ine.mx/transparencia/datos-abiertos/visualizacion-datos/conteos-censales-participacion/ Convocatoria: https://ine.mx/wp-content/uploads/2026/09/Convocatoria_Hackaton-1.pdf</a:t>
             </a:r>
           </a:p>
         </p:txBody>
@@ -1081,7 +1081,7 @@
           </a:p>
           <a:p>
             <a:r>
-              <a:t>Demo6. Umbrales nacionales por año y método; fijos entre escenarios. Fuentes primarias: https://ine.mx/transparencia/datos-abiertos/visualizacion-datos/conteos-censales-participacion/ Convocatoria: https://ine.mx/wp-content/uploads/2026/09/Convocatoria_Hackaton-1.pdf</a:t>
+              <a:t>Demo7 y docs/PLANES_ACCION_ESTATALES_PARTICIPACION.md, sección 8. Propuestas por validar con el área usuaria. Fuentes primarias: https://ine.mx/transparencia/datos-abiertos/visualizacion-datos/conteos-censales-participacion/ Convocatoria: https://ine.mx/wp-content/uploads/2026/09/Convocatoria_Hackaton-1.pdf</a:t>
             </a:r>
           </a:p>
         </p:txBody>
@@ -4488,7 +4488,7 @@
                 </a:solidFill>
                 <a:latin typeface="Segoe UI"/>
               </a:rPr>
-              <a:t>Versión técnica · 16 de octubre de 2026</a:t>
+              <a:t>Versión técnica · 21 de octubre de 2026</a:t>
             </a:r>
           </a:p>
         </p:txBody>
@@ -4786,7 +4786,7 @@
                 </a:solidFill>
                 <a:latin typeface="Segoe UI"/>
               </a:rPr>
-              <a:t>Equipo: aguas.exe. Firmas, registro y envío formal siguen pendientes.</a:t>
+              <a:t>Equipo: aguas.exe. Registro, elegibilidad, firmas y envío formal no acreditados.</a:t>
             </a:r>
           </a:p>
         </p:txBody>
@@ -4914,7 +4914,7 @@
                 </a:solidFill>
                 <a:latin typeface="Segoe UI"/>
               </a:rPr>
-              <a:t>Consulta territorial en demo6</a:t>
+              <a:t>Consulta territorial en demo7</a:t>
             </a:r>
           </a:p>
         </p:txBody>
@@ -5084,7 +5084,7 @@
                 </a:solidFill>
                 <a:latin typeface="Segoe UI"/>
               </a:rPr>
-              <a:t>Guía: demo/DEMO6.md. Cartografía municipal y complemento insular INEGI 2025.</a:t>
+              <a:t>Guía: demo/DEMO7.md. Cartografía municipal y complemento insular INEGI 2025.</a:t>
             </a:r>
           </a:p>
         </p:txBody>
@@ -6839,7 +6839,7 @@
                 </a:solidFill>
                 <a:latin typeface="Segoe UI"/>
               </a:rPr>
-              <a:t>Una ficha para entender la selección</a:t>
+              <a:t>Plan estatal y semáforo en demo7</a:t>
             </a:r>
           </a:p>
         </p:txBody>
@@ -6873,7 +6873,7 @@
                 </a:solidFill>
                 <a:latin typeface="Segoe UI"/>
               </a:rPr>
-              <a:t>Resultados observados y proyección diferenciados</a:t>
+              <a:t>Escenario hipotético editable</a:t>
             </a:r>
           </a:p>
         </p:txBody>
@@ -6907,7 +6907,7 @@
                 </a:solidFill>
                 <a:latin typeface="Segoe UI"/>
               </a:rPr>
-              <a:t>Serie temporal 2009–2024 con 2027 separado visualmente. Faltantes visibles y cobertura declarada.</a:t>
+              <a:t>Cobertura inicial del 10%; efecto supuesto de 1.5 pp entre alcanzados. Variantes de 0.3 y 3 pp. No es eficacia medida del plan.</a:t>
             </a:r>
           </a:p>
         </p:txBody>
@@ -6941,7 +6941,7 @@
                 </a:solidFill>
                 <a:latin typeface="Segoe UI"/>
               </a:rPr>
-              <a:t>Brecha municipal frente al estado con el mismo método y denominador. Las diferencias agregadas no identifican causas.</a:t>
+              <a:t>Mapas sin/con acción con cortes nacionales fijos por tercios: bajo, medio y alto. Gris significa sin estimación; nunca cero.</a:t>
             </a:r>
           </a:p>
         </p:txBody>
@@ -6975,7 +6975,7 @@
                 </a:solidFill>
                 <a:latin typeface="Segoe UI"/>
               </a:rPr>
-              <a:t>Métricas reales y coeficientes Ridge disponibles. Los coeficientes no son efectos causales ni explicaciones individuales.</a:t>
+              <a:t>Distribución proporcional; CSV con tasas antes/después, semáforo, cobertura, método y fuentes. La vista de diferencias muestra cambios pequeños.</a:t>
             </a:r>
           </a:p>
         </p:txBody>
@@ -7009,7 +7009,7 @@
                 </a:solidFill>
                 <a:latin typeface="Segoe UI"/>
               </a:rPr>
-              <a:t>Demo6. Umbrales nacionales por año y método; fijos entre escenarios.</a:t>
+              <a:t>Demo7 y docs/PLANES_ACCION_ESTATALES_PARTICIPACION.md, sección 8. Propuestas por validar con el área usuaria.</a:t>
             </a:r>
           </a:p>
         </p:txBody>
@@ -7435,7 +7435,7 @@
                 </a:solidFill>
                 <a:latin typeface="Segoe UI"/>
               </a:rPr>
-              <a:t>Exportar territorio, acción y cita, cobertura total, distribución, supuestos y estabilidad del plan actual.</a:t>
+              <a:t>Definir prioridad y cobertura; exportar territorio, acción, fuente, distribución y supuestos. Revisar la estabilidad por separado.</a:t>
             </a:r>
           </a:p>
         </p:txBody>

--- a/02_Prediccion_y_escenarios_de_riesgo/entrega/presentacion/Umbral_presentacion.pptx
+++ b/02_Prediccion_y_escenarios_de_riesgo/entrega/presentacion/Umbral_presentacion.pptx
@@ -601,7 +601,7 @@
           </a:p>
           <a:p>
             <a:r>
-              <a:t>2024 es presidencial y no valida directamente 2027. No se promete superioridad predictiva o efectividad preventiva. Fuentes primarias: https://ine.mx/transparencia/datos-abiertos/visualizacion-datos/conteos-censales-participacion/ Convocatoria: https://ine.mx/wp-content/uploads/2026/09/Convocatoria_Hackaton-1.pdf</a:t>
+              <a:t>https://github.com/Donatelatrump/Ine_Hackaton_2026 · Proyección 2027 exploratoria; efecto preventivo por evaluar. Fuentes primarias: https://ine.mx/transparencia/datos-abiertos/visualizacion-datos/conteos-censales-participacion/ Convocatoria: https://ine.mx/wp-content/uploads/2026/09/Convocatoria_Hackaton-1.pdf</a:t>
             </a:r>
           </a:p>
         </p:txBody>
@@ -1241,7 +1241,7 @@
           </a:p>
           <a:p>
             <a:r>
-              <a:t>Caso completo: entrega/CASO_MUNICIPAL.md. Guion y demo de tres pasos: entrega/GUION_PRESENTACION.md. Fuentes primarias: https://ine.mx/transparencia/datos-abiertos/visualizacion-datos/conteos-censales-participacion/ Convocatoria: https://ine.mx/wp-content/uploads/2026/09/Convocatoria_Hackaton-1.pdf</a:t>
+              <a:t>Caso completo: entrega/CASO_MUNICIPAL.md. Guion de cuatro bloques: entrega/GUION_PRESENTACION.md. Fuentes primarias: https://ine.mx/transparencia/datos-abiertos/visualizacion-datos/conteos-censales-participacion/ Convocatoria: https://ine.mx/wp-content/uploads/2026/09/Convocatoria_Hackaton-1.pdf</a:t>
             </a:r>
           </a:p>
         </p:txBody>
@@ -4488,7 +4488,7 @@
                 </a:solidFill>
                 <a:latin typeface="Segoe UI"/>
               </a:rPr>
-              <a:t>Versión técnica · 21 de octubre de 2026</a:t>
+              <a:t>Versión técnica · 22 de octubre de 2026</a:t>
             </a:r>
           </a:p>
         </p:txBody>
@@ -4786,7 +4786,7 @@
                 </a:solidFill>
                 <a:latin typeface="Segoe UI"/>
               </a:rPr>
-              <a:t>Equipo: aguas.exe. Registro, elegibilidad, firmas y envío formal no acreditados.</a:t>
+              <a:t>Equipo: aguas.exe · Código, datos y guía de ejecución en el repositorio.</a:t>
             </a:r>
           </a:p>
         </p:txBody>
@@ -4820,7 +4820,7 @@
                 </a:solidFill>
                 <a:latin typeface="Segoe UI"/>
               </a:rPr>
-              <a:t>2024 es presidencial y no valida directamente 2027. No se promete superioridad predictiva o efectividad preventiva.</a:t>
+              <a:t>https://github.com/Donatelatrump/Ine_Hackaton_2026 · Proyección 2027 exploratoria; efecto preventivo por evaluar.</a:t>
             </a:r>
           </a:p>
         </p:txBody>
@@ -6426,8 +6426,8 @@
         </p:nvSpPr>
         <p:spPr>
           <a:xfrm>
-            <a:off x="594360" y="5120640"/>
-            <a:ext cx="10972800" cy="692912"/>
+            <a:off x="594360" y="5029200"/>
+            <a:ext cx="10972800" cy="661924"/>
           </a:xfrm>
           <a:prstGeom prst="rect">
             <a:avLst/>
@@ -6441,13 +6441,13 @@
           <a:lstStyle/>
           <a:p>
             <a:r>
-              <a:rPr sz="2000" b="0">
+              <a:rPr sz="1900" b="0">
                 <a:solidFill>
                   <a:srgbClr val="15353B"/>
                 </a:solidFill>
                 <a:latin typeface="Segoe UI"/>
               </a:rPr>
-              <a:t>Empate de MAE con tolerancia 0.05 pp; gana por error ponderado. Ridge es el más rápido. Selección retrospectiva.</a:t>
+              <a:t>Desempate por error ponderado (tolerancia MAE: 0.05 pp). Ridge es el más rápido. Selección retrospectiva.</a:t>
             </a:r>
           </a:p>
         </p:txBody>
@@ -6455,6 +6455,40 @@
       <p:sp>
         <p:nvSpPr>
           <p:cNvPr id="8" name="Texto editable"/>
+          <p:cNvSpPr txBox="1"/>
+          <p:nvPr/>
+        </p:nvSpPr>
+        <p:spPr>
+          <a:xfrm>
+            <a:off x="594360" y="5650992"/>
+            <a:ext cx="10972800" cy="336550"/>
+          </a:xfrm>
+          <a:prstGeom prst="rect">
+            <a:avLst/>
+          </a:prstGeom>
+          <a:noFill/>
+        </p:spPr>
+        <p:txBody>
+          <a:bodyPr wrap="square" lIns="0" rIns="0" tIns="0" bIns="0">
+            <a:spAutoFit/>
+          </a:bodyPr>
+          <a:lstStyle/>
+          <a:p>
+            <a:r>
+              <a:rPr sz="1700" b="0">
+                <a:solidFill>
+                  <a:srgbClr val="15353B"/>
+                </a:solidFill>
+                <a:latin typeface="Segoe UI"/>
+              </a:rPr>
+              <a:t>Top50 en 2024: referencia 27/50; modelo 19/50. Menor error no garantiza mejor priorización.</a:t>
+            </a:r>
+          </a:p>
+        </p:txBody>
+      </p:sp>
+      <p:sp>
+        <p:nvSpPr>
+          <p:cNvPr id="9" name="Texto editable"/>
           <p:cNvSpPr txBox="1"/>
           <p:nvPr/>
         </p:nvSpPr>
@@ -7537,7 +7571,7 @@
                 </a:solidFill>
                 <a:latin typeface="Segoe UI"/>
               </a:rPr>
-              <a:t>Caso completo: entrega/CASO_MUNICIPAL.md. Guion y demo de tres pasos: entrega/GUION_PRESENTACION.md.</a:t>
+              <a:t>Caso completo: entrega/CASO_MUNICIPAL.md. Guion de cuatro bloques: entrega/GUION_PRESENTACION.md.</a:t>
             </a:r>
           </a:p>
         </p:txBody>

--- a/02_Prediccion_y_escenarios_de_riesgo/entrega/presentacion/Umbral_presentacion.pptx
+++ b/02_Prediccion_y_escenarios_de_riesgo/entrega/presentacion/Umbral_presentacion.pptx
@@ -681,7 +681,7 @@
           </a:p>
           <a:p>
             <a:r>
-              <a:t>Guía: demo/DEMO7.md. Cartografía municipal y complemento insular INEGI 2025. Fuentes primarias: https://ine.mx/transparencia/datos-abiertos/visualizacion-datos/conteos-censales-participacion/ Convocatoria: https://ine.mx/wp-content/uploads/2026/09/Convocatoria_Hackaton-1.pdf</a:t>
+              <a:t>Guía: demo/README.md. Cartografía municipal y complemento insular INEGI 2025. Fuentes primarias: https://ine.mx/transparencia/datos-abiertos/visualizacion-datos/conteos-censales-participacion/ Convocatoria: https://ine.mx/wp-content/uploads/2026/09/Convocatoria_Hackaton-1.pdf</a:t>
             </a:r>
           </a:p>
         </p:txBody>
@@ -1081,7 +1081,7 @@
           </a:p>
           <a:p>
             <a:r>
-              <a:t>Demo7 y docs/PLANES_ACCION_ESTATALES_PARTICIPACION.md, sección 8. Propuestas por validar con el área usuaria. Fuentes primarias: https://ine.mx/transparencia/datos-abiertos/visualizacion-datos/conteos-censales-participacion/ Convocatoria: https://ine.mx/wp-content/uploads/2026/09/Convocatoria_Hackaton-1.pdf</a:t>
+              <a:t>Umbral y docs/PLANES_ACCION_ESTATALES_PARTICIPACION.md, sección 8. Propuestas por validar con el área usuaria. Fuentes primarias: https://ine.mx/transparencia/datos-abiertos/visualizacion-datos/conteos-censales-participacion/ Convocatoria: https://ine.mx/wp-content/uploads/2026/09/Convocatoria_Hackaton-1.pdf</a:t>
             </a:r>
           </a:p>
         </p:txBody>
@@ -4914,7 +4914,7 @@
                 </a:solidFill>
                 <a:latin typeface="Segoe UI"/>
               </a:rPr>
-              <a:t>Consulta territorial en demo7</a:t>
+              <a:t>Consulta territorial en Umbral</a:t>
             </a:r>
           </a:p>
         </p:txBody>
@@ -5084,7 +5084,7 @@
                 </a:solidFill>
                 <a:latin typeface="Segoe UI"/>
               </a:rPr>
-              <a:t>Guía: demo/DEMO7.md. Cartografía municipal y complemento insular INEGI 2025.</a:t>
+              <a:t>Guía: demo/README.md. Cartografía municipal y complemento insular INEGI 2025.</a:t>
             </a:r>
           </a:p>
         </p:txBody>
@@ -6873,7 +6873,7 @@
                 </a:solidFill>
                 <a:latin typeface="Segoe UI"/>
               </a:rPr>
-              <a:t>Plan estatal y semáforo en demo7</a:t>
+              <a:t>Plan estatal y semáforo en Umbral</a:t>
             </a:r>
           </a:p>
         </p:txBody>
@@ -6907,7 +6907,7 @@
                 </a:solidFill>
                 <a:latin typeface="Segoe UI"/>
               </a:rPr>
-              <a:t>Escenario hipotético editable</a:t>
+              <a:t>Plan estatal con cálculo de referencia</a:t>
             </a:r>
           </a:p>
         </p:txBody>
@@ -6941,7 +6941,7 @@
                 </a:solidFill>
                 <a:latin typeface="Segoe UI"/>
               </a:rPr>
-              <a:t>Cobertura inicial del 10%; efecto supuesto de 1.5 pp entre alcanzados. Variantes de 0.3 y 3 pp. No es eficacia medida del plan.</a:t>
+              <a:t>Cobertura fija del 10%; efecto supuesto de 1.5 pp entre alcanzados. El simulador separado permite explorar acciones. No es eficacia medida del plan.</a:t>
             </a:r>
           </a:p>
         </p:txBody>
@@ -7043,7 +7043,7 @@
                 </a:solidFill>
                 <a:latin typeface="Segoe UI"/>
               </a:rPr>
-              <a:t>Demo7 y docs/PLANES_ACCION_ESTATALES_PARTICIPACION.md, sección 8. Propuestas por validar con el área usuaria.</a:t>
+              <a:t>Umbral y docs/PLANES_ACCION_ESTATALES_PARTICIPACION.md, sección 8. Propuestas por validar con el área usuaria.</a:t>
             </a:r>
           </a:p>
         </p:txBody>
